--- a/presentations/BL_L02_TruthTableDetectives_Lesson.pptx
+++ b/presentations/BL_L02_TruthTableDetectives_Lesson.pptx
@@ -19,9 +19,11 @@
     <p:sldId id="267" r:id="rId13"/>
     <p:sldId id="268" r:id="rId14"/>
     <p:sldId id="269" r:id="rId15"/>
+    <p:sldId id="270" r:id="rId16"/>
+    <p:sldId id="271" r:id="rId17"/>
   </p:sldIdLst>
   <p:notesMasterIdLst>
-    <p:notesMasterId r:id="rId16"/>
+    <p:notesMasterId r:id="rId18"/>
   </p:notesMasterIdLst>
   <p:sldSz cx="12192000" cy="6858000"/>
   <p:notesSz cx="6858000" cy="12192000"/>
@@ -692,7 +694,10 @@
           <a:p>
             <a:r>
               <a:rPr lang="en-US" dirty="0"/>
-              <a:t>Make them commit to an answer on paper before they tap the star. Guessing first costs them the learning.</a:t>
+              <a:t>Build this at the front. Draw the empty table first and make the class tell you how many rows before a single 1 goes in.
+The expression is deliberately not one the pupils are about to complete. The stations use (A AND B) AND NOT C and NOT A AND (B OR C); the exam practice is NOT P OR (Q AND R). A OR (NOT B) is none of them, and it is small enough to build live without losing the room.
+The intermediate NOT B column is the move to insist on. Pupils who try to do a bracket in their heads are the ones who lose rows on an eight-mark table, and this is the moment to say so.
+Say this out loud: Count the rows before you draw anything, and give every bracket a column of its own.</a:t>
             </a:r>
             <a:endParaRPr lang="en-US" dirty="0"/>
           </a:p>
@@ -780,7 +785,13 @@
           <a:p>
             <a:r>
               <a:rPr lang="en-US" dirty="0"/>
-              <a:t>Use these as a settler, or as something for early finishers to read in the experience.</a:t>
+              <a:t>The answer is C: AND.
+Do not say it yet. Every pupil commits first - fingers, whiteboards or a show of hands on each letter in turn - and you count the split before anyone can change their mind.
+IF MOST OF THE CLASS IS RIGHT: say why it is right in one sentence and go straight on to the independent work.
+IF A SIGNIFICANT GROUP IS ON ONE WRONG LETTER: that option is the misconception to teach against before anyone goes on. Go back to station 2, Electric circuits, and work through its example again, aloud, with the class watching, then re-ask this question.
+The course's own response to a wrong answer here: Current can only flow if both switches are closed.
+A limitation, stated rather than papered over: one response covers every wrong option; it does not say what to revisit for each one. The course does not record what each separate wrong option means, and this slide does not invent it. Decide your own reteach for each option before the lesson; the options above are the start of it.
+This is a real activity from the experience (bl-l02-s2-c1), so the wording here is the wording a pupil will see.</a:t>
             </a:r>
             <a:endParaRPr lang="en-US" dirty="0"/>
           </a:p>
@@ -868,7 +879,7 @@
           <a:p>
             <a:r>
               <a:rPr lang="en-US" dirty="0"/>
-              <a:t>Timed and silent. Mark against the answer sheet, then ask students to record their weakest area.</a:t>
+              <a:t>Make them commit to an answer on paper before they tap the star. Guessing first costs them the learning.</a:t>
             </a:r>
             <a:endParaRPr lang="en-US" dirty="0"/>
           </a:p>
@@ -956,7 +967,7 @@
           <a:p>
             <a:r>
               <a:rPr lang="en-US" dirty="0"/>
-              <a:t>Students copy their score-screen breakdown onto the worksheet, then rate themselves here.</a:t>
+              <a:t>Use these as a settler, or as something for early finishers to read in the experience.</a:t>
             </a:r>
             <a:endParaRPr lang="en-US" dirty="0"/>
           </a:p>
@@ -980,6 +991,182 @@
             <a:fld id="{F7021451-1387-4CA6-816F-3879F97B5CBC}" type="slidenum">
               <a:rPr lang="en-US"/>
               <a:t>14</a:t>
+            </a:fld>
+            <a:endParaRPr lang="en-US"/>
+          </a:p>
+        </p:txBody>
+      </p:sp>
+    </p:spTree>
+    <p:extLst>
+      <p:ext uri="{BB962C8B-B14F-4D97-AF65-F5344CB8AC3E}">
+        <p14:creationId xmlns:p14="http://schemas.microsoft.com/office/powerpoint/2010/main" val="1024086991"/>
+      </p:ext>
+    </p:extLst>
+  </p:cSld>
+  <p:clrMapOvr>
+    <a:masterClrMapping/>
+  </p:clrMapOvr>
+</p:notes>
+</file>
+
+<file path=ppt/notesSlides/notesSlide15.xml><?xml version="1.0" encoding="utf-8"?>
+<p:notes xmlns:a="http://schemas.openxmlformats.org/drawingml/2006/main" xmlns:r="http://schemas.openxmlformats.org/officeDocument/2006/relationships" xmlns:p="http://schemas.openxmlformats.org/presentationml/2006/main">
+  <p:cSld>
+    <p:spTree>
+      <p:nvGrpSpPr>
+        <p:cNvPr id="1" name=""/>
+        <p:cNvGrpSpPr/>
+        <p:nvPr/>
+      </p:nvGrpSpPr>
+      <p:grpSpPr>
+        <a:xfrm>
+          <a:off x="0" y="0"/>
+          <a:ext cx="0" cy="0"/>
+          <a:chOff x="0" y="0"/>
+          <a:chExt cx="0" cy="0"/>
+        </a:xfrm>
+      </p:grpSpPr>
+      <p:sp>
+        <p:nvSpPr>
+          <p:cNvPr id="2" name="Slide Image Placeholder 1"/>
+          <p:cNvSpPr>
+            <a:spLocks noGrp="1" noRot="1" noChangeAspect="1"/>
+          </p:cNvSpPr>
+          <p:nvPr>
+            <p:ph type="sldImg"/>
+          </p:nvPr>
+        </p:nvSpPr>
+        <p:spPr/>
+      </p:sp>
+      <p:sp>
+        <p:nvSpPr>
+          <p:cNvPr id="3" name="Notes Placeholder 2"/>
+          <p:cNvSpPr>
+            <a:spLocks noGrp="1"/>
+          </p:cNvSpPr>
+          <p:nvPr>
+            <p:ph type="body" idx="1"/>
+          </p:nvPr>
+        </p:nvSpPr>
+        <p:spPr/>
+        <p:txBody>
+          <a:bodyPr/>
+          <a:lstStyle/>
+          <a:p>
+            <a:r>
+              <a:rPr lang="en-US" dirty="0"/>
+              <a:t>Timed and silent. Mark against the answer sheet, then ask students to record their weakest area.</a:t>
+            </a:r>
+            <a:endParaRPr lang="en-US" dirty="0"/>
+          </a:p>
+        </p:txBody>
+      </p:sp>
+      <p:sp>
+        <p:nvSpPr>
+          <p:cNvPr id="4" name="Slide Number Placeholder 3"/>
+          <p:cNvSpPr>
+            <a:spLocks noGrp="1"/>
+          </p:cNvSpPr>
+          <p:nvPr>
+            <p:ph type="sldNum" sz="quarter" idx="10"/>
+          </p:nvPr>
+        </p:nvSpPr>
+        <p:spPr/>
+        <p:txBody>
+          <a:bodyPr/>
+          <a:lstStyle/>
+          <a:p>
+            <a:fld id="{F7021451-1387-4CA6-816F-3879F97B5CBC}" type="slidenum">
+              <a:rPr lang="en-US"/>
+              <a:t>15</a:t>
+            </a:fld>
+            <a:endParaRPr lang="en-US"/>
+          </a:p>
+        </p:txBody>
+      </p:sp>
+    </p:spTree>
+    <p:extLst>
+      <p:ext uri="{BB962C8B-B14F-4D97-AF65-F5344CB8AC3E}">
+        <p14:creationId xmlns:p14="http://schemas.microsoft.com/office/powerpoint/2010/main" val="1024086991"/>
+      </p:ext>
+    </p:extLst>
+  </p:cSld>
+  <p:clrMapOvr>
+    <a:masterClrMapping/>
+  </p:clrMapOvr>
+</p:notes>
+</file>
+
+<file path=ppt/notesSlides/notesSlide16.xml><?xml version="1.0" encoding="utf-8"?>
+<p:notes xmlns:a="http://schemas.openxmlformats.org/drawingml/2006/main" xmlns:r="http://schemas.openxmlformats.org/officeDocument/2006/relationships" xmlns:p="http://schemas.openxmlformats.org/presentationml/2006/main">
+  <p:cSld>
+    <p:spTree>
+      <p:nvGrpSpPr>
+        <p:cNvPr id="1" name=""/>
+        <p:cNvGrpSpPr/>
+        <p:nvPr/>
+      </p:nvGrpSpPr>
+      <p:grpSpPr>
+        <a:xfrm>
+          <a:off x="0" y="0"/>
+          <a:ext cx="0" cy="0"/>
+          <a:chOff x="0" y="0"/>
+          <a:chExt cx="0" cy="0"/>
+        </a:xfrm>
+      </p:grpSpPr>
+      <p:sp>
+        <p:nvSpPr>
+          <p:cNvPr id="2" name="Slide Image Placeholder 1"/>
+          <p:cNvSpPr>
+            <a:spLocks noGrp="1" noRot="1" noChangeAspect="1"/>
+          </p:cNvSpPr>
+          <p:nvPr>
+            <p:ph type="sldImg"/>
+          </p:nvPr>
+        </p:nvSpPr>
+        <p:spPr/>
+      </p:sp>
+      <p:sp>
+        <p:nvSpPr>
+          <p:cNvPr id="3" name="Notes Placeholder 2"/>
+          <p:cNvSpPr>
+            <a:spLocks noGrp="1"/>
+          </p:cNvSpPr>
+          <p:nvPr>
+            <p:ph type="body" idx="1"/>
+          </p:nvPr>
+        </p:nvSpPr>
+        <p:spPr/>
+        <p:txBody>
+          <a:bodyPr/>
+          <a:lstStyle/>
+          <a:p>
+            <a:r>
+              <a:rPr lang="en-US" dirty="0"/>
+              <a:t>Students copy their score-screen breakdown onto the worksheet, then rate themselves here.</a:t>
+            </a:r>
+            <a:endParaRPr lang="en-US" dirty="0"/>
+          </a:p>
+        </p:txBody>
+      </p:sp>
+      <p:sp>
+        <p:nvSpPr>
+          <p:cNvPr id="4" name="Slide Number Placeholder 3"/>
+          <p:cNvSpPr>
+            <a:spLocks noGrp="1"/>
+          </p:cNvSpPr>
+          <p:nvPr>
+            <p:ph type="sldNum" sz="quarter" idx="10"/>
+          </p:nvPr>
+        </p:nvSpPr>
+        <p:spPr/>
+        <p:txBody>
+          <a:bodyPr/>
+          <a:lstStyle/>
+          <a:p>
+            <a:fld id="{F7021451-1387-4CA6-816F-3879F97B5CBC}" type="slidenum">
+              <a:rPr lang="en-US"/>
+              <a:t>16</a:t>
             </a:fld>
             <a:endParaRPr lang="en-US"/>
           </a:p>
@@ -2943,75 +3130,14 @@
       </p:sp>
       <p:sp>
         <p:nvSpPr>
-          <p:cNvPr id="5" name="Shape 3"/>
-          <p:cNvSpPr/>
-          <p:nvPr/>
-        </p:nvSpPr>
-        <p:spPr>
-          <a:xfrm>
-            <a:off x="502920" y="438912"/>
-            <a:ext cx="3108960" cy="502920"/>
-          </a:xfrm>
-          <a:prstGeom prst="roundRect">
-            <a:avLst>
-              <a:gd name="adj" fmla="val 18182"/>
-            </a:avLst>
-          </a:prstGeom>
-          <a:solidFill>
-            <a:srgbClr val="F4B942"/>
-          </a:solidFill>
-          <a:ln/>
-        </p:spPr>
-      </p:sp>
-      <p:sp>
-        <p:nvSpPr>
-          <p:cNvPr id="6" name="Text 4"/>
-          <p:cNvSpPr txBox="1"/>
-          <p:nvPr/>
-        </p:nvSpPr>
-        <p:spPr>
-          <a:xfrm>
-            <a:off x="502920" y="438912"/>
-            <a:ext cx="3108960" cy="502920"/>
-          </a:xfrm>
-          <a:prstGeom prst="rect">
-            <a:avLst/>
-          </a:prstGeom>
-          <a:noFill/>
-          <a:ln/>
-        </p:spPr>
-        <p:txBody>
-          <a:bodyPr wrap="square" lIns="0" tIns="0" rIns="0" bIns="0" rtlCol="0" anchor="ctr"/>
-          <a:lstStyle/>
-          <a:p>
-            <a:pPr algn="ctr" indent="0" marL="0">
-              <a:buNone/>
-            </a:pPr>
-            <a:r>
-              <a:rPr lang="en-US" sz="1300" b="1" dirty="0">
-                <a:solidFill>
-                  <a:srgbClr val="101828"/>
-                </a:solidFill>
-                <a:latin typeface="IBM Plex Mono" pitchFamily="34" charset="0"/>
-                <a:ea typeface="IBM Plex Mono" pitchFamily="34" charset="-122"/>
-                <a:cs typeface="IBM Plex Mono" pitchFamily="34" charset="-120"/>
-              </a:rPr>
-              <a:t>★  FINAL CHALLENGE</a:t>
-            </a:r>
-            <a:endParaRPr lang="en-US" sz="1300" dirty="0"/>
-          </a:p>
-        </p:txBody>
-      </p:sp>
-      <p:sp>
-        <p:nvSpPr>
-          <p:cNvPr id="7" name="Text 5"/>
-          <p:cNvSpPr txBox="1"/>
-          <p:nvPr/>
-        </p:nvSpPr>
-        <p:spPr>
-          <a:xfrm>
-            <a:off x="502920" y="1097280"/>
-            <a:ext cx="11155680" cy="731520"/>
+          <p:cNvPr id="5" name="Text 3"/>
+          <p:cNvSpPr txBox="1"/>
+          <p:nvPr/>
+        </p:nvSpPr>
+        <p:spPr>
+          <a:xfrm>
+            <a:off x="502920" y="411480"/>
+            <a:ext cx="11155680" cy="777240"/>
           </a:xfrm>
           <a:prstGeom prst="rect">
             <a:avLst/>
@@ -3027,7 +3153,7 @@
               <a:buNone/>
             </a:pPr>
             <a:r>
-              <a:rPr lang="en-US" sz="3400" b="1" dirty="0">
+              <a:rPr lang="en-US" sz="3200" b="1" dirty="0">
                 <a:solidFill>
                   <a:srgbClr val="101828"/>
                 </a:solidFill>
@@ -3035,26 +3161,65 @@
                 <a:ea typeface="IBM Plex Sans" pitchFamily="34" charset="-122"/>
                 <a:cs typeface="IBM Plex Sans" pitchFamily="34" charset="-120"/>
               </a:rPr>
-              <a:t>Detective's table</a:t>
-            </a:r>
-            <a:endParaRPr lang="en-US" sz="3400" dirty="0"/>
-          </a:p>
-        </p:txBody>
-      </p:sp>
-      <p:sp>
-        <p:nvSpPr>
-          <p:cNvPr id="8" name="Shape 6"/>
+              <a:t>Watch me build one</a:t>
+            </a:r>
+            <a:endParaRPr lang="en-US" sz="3200" dirty="0"/>
+          </a:p>
+        </p:txBody>
+      </p:sp>
+      <p:sp>
+        <p:nvSpPr>
+          <p:cNvPr id="6" name="Text 4"/>
+          <p:cNvSpPr txBox="1"/>
+          <p:nvPr/>
+        </p:nvSpPr>
+        <p:spPr>
+          <a:xfrm>
+            <a:off x="502920" y="1170432"/>
+            <a:ext cx="11155680" cy="411480"/>
+          </a:xfrm>
+          <a:prstGeom prst="rect">
+            <a:avLst/>
+          </a:prstGeom>
+          <a:noFill/>
+          <a:ln/>
+        </p:spPr>
+        <p:txBody>
+          <a:bodyPr wrap="square" lIns="0" tIns="0" rIns="0" bIns="0" rtlCol="0" anchor="ctr"/>
+          <a:lstStyle/>
+          <a:p>
+            <a:pPr indent="0" marL="0">
+              <a:buNone/>
+            </a:pPr>
+            <a:r>
+              <a:rPr lang="en-US" sz="1500" dirty="0">
+                <a:solidFill>
+                  <a:srgbClr val="667085"/>
+                </a:solidFill>
+                <a:latin typeface="IBM Plex Sans" pitchFamily="34" charset="0"/>
+                <a:ea typeface="IBM Plex Sans" pitchFamily="34" charset="-122"/>
+                <a:cs typeface="IBM Plex Sans" pitchFamily="34" charset="-120"/>
+              </a:rPr>
+              <a:t>A different expression from yours, so you get the method and not the answer</a:t>
+            </a:r>
+            <a:endParaRPr lang="en-US" sz="1500" dirty="0"/>
+          </a:p>
+        </p:txBody>
+      </p:sp>
+      <p:sp>
+        <p:nvSpPr>
+          <p:cNvPr id="7" name="Shape 5"/>
           <p:cNvSpPr/>
           <p:nvPr/>
         </p:nvSpPr>
         <p:spPr>
           <a:xfrm>
-            <a:off x="502920" y="2011680"/>
-            <a:ext cx="11155680" cy="2194560"/>
+            <a:off x="502920" y="1719072"/>
+            <a:ext cx="3566160" cy="2351853"/>
           </a:xfrm>
           <a:prstGeom prst="roundRect">
             <a:avLst>
-              <a:gd name="adj" fmla="val 5000"/>
+              <a:gd name="adj" fmla="val 4666"/>
             </a:avLst>
           </a:prstGeom>
           <a:solidFill>
@@ -3062,7 +3227,7 @@
           </a:solidFill>
           <a:ln w="15875">
             <a:solidFill>
-              <a:srgbClr val="2D63FF"/>
+              <a:srgbClr val="D9DEE7"/>
             </a:solidFill>
             <a:prstDash val="solid"/>
           </a:ln>
@@ -3070,33 +3235,72 @@
       </p:sp>
       <p:sp>
         <p:nvSpPr>
+          <p:cNvPr id="8" name="Text 6"/>
+          <p:cNvSpPr txBox="1"/>
+          <p:nvPr/>
+        </p:nvSpPr>
+        <p:spPr>
+          <a:xfrm>
+            <a:off x="777240" y="1883664"/>
+            <a:ext cx="3017520" cy="292608"/>
+          </a:xfrm>
+          <a:prstGeom prst="rect">
+            <a:avLst/>
+          </a:prstGeom>
+          <a:noFill/>
+          <a:ln/>
+        </p:spPr>
+        <p:txBody>
+          <a:bodyPr wrap="square" lIns="0" tIns="0" rIns="0" bIns="0" rtlCol="0" anchor="ctr"/>
+          <a:lstStyle/>
+          <a:p>
+            <a:pPr indent="0" marL="0">
+              <a:buNone/>
+            </a:pPr>
+            <a:r>
+              <a:rPr lang="en-US" sz="1100" b="1" dirty="0">
+                <a:solidFill>
+                  <a:srgbClr val="667085"/>
+                </a:solidFill>
+                <a:latin typeface="IBM Plex Mono" pitchFamily="34" charset="0"/>
+                <a:ea typeface="IBM Plex Mono" pitchFamily="34" charset="-122"/>
+                <a:cs typeface="IBM Plex Mono" pitchFamily="34" charset="-120"/>
+              </a:rPr>
+              <a:t>THE EXPRESSION</a:t>
+            </a:r>
+            <a:endParaRPr lang="en-US" sz="1100" dirty="0"/>
+          </a:p>
+        </p:txBody>
+      </p:sp>
+      <p:sp>
+        <p:nvSpPr>
           <p:cNvPr id="9" name="Text 7"/>
           <p:cNvSpPr txBox="1"/>
           <p:nvPr/>
         </p:nvSpPr>
         <p:spPr>
           <a:xfrm>
-            <a:off x="1005840" y="2331720"/>
-            <a:ext cx="10149840" cy="1554480"/>
-          </a:xfrm>
-          <a:prstGeom prst="rect">
-            <a:avLst/>
-          </a:prstGeom>
-          <a:noFill/>
-          <a:ln/>
-        </p:spPr>
-        <p:txBody>
-          <a:bodyPr wrap="square" lIns="0" tIns="0" rIns="0" bIns="0" rtlCol="0" anchor="ctr"/>
+            <a:off x="777240" y="2231136"/>
+            <a:ext cx="3017520" cy="1693485"/>
+          </a:xfrm>
+          <a:prstGeom prst="rect">
+            <a:avLst/>
+          </a:prstGeom>
+          <a:noFill/>
+          <a:ln/>
+        </p:spPr>
+        <p:txBody>
+          <a:bodyPr wrap="square" lIns="0" tIns="0" rIns="0" bIns="0" rtlCol="0" anchor="t"/>
           <a:lstStyle/>
           <a:p>
             <a:pPr indent="0" marL="0">
               <a:lnSpc>
-                <a:spcPct val="130000"/>
+                <a:spcPct val="118000"/>
               </a:lnSpc>
               <a:buNone/>
             </a:pPr>
             <a:r>
-              <a:rPr lang="en-US" sz="2200" dirty="0">
+              <a:rPr lang="en-US" sz="1200" dirty="0">
                 <a:solidFill>
                   <a:srgbClr val="101828"/>
                 </a:solidFill>
@@ -3104,48 +3308,587 @@
                 <a:ea typeface="IBM Plex Sans" pitchFamily="34" charset="-122"/>
                 <a:cs typeface="IBM Plex Sans" pitchFamily="34" charset="-120"/>
               </a:rPr>
-              <a:t>Complete the full truth table, using the intermediate columns to help you.</a:t>
-            </a:r>
-            <a:endParaRPr lang="en-US" sz="2200" dirty="0"/>
-          </a:p>
-        </p:txBody>
-      </p:sp>
-      <p:sp>
-        <p:nvSpPr>
-          <p:cNvPr id="10" name="Text 8"/>
-          <p:cNvSpPr txBox="1"/>
-          <p:nvPr/>
-        </p:nvSpPr>
-        <p:spPr>
-          <a:xfrm>
-            <a:off x="502920" y="4526280"/>
-            <a:ext cx="11155680" cy="457200"/>
-          </a:xfrm>
-          <a:prstGeom prst="rect">
-            <a:avLst/>
-          </a:prstGeom>
-          <a:noFill/>
-          <a:ln/>
-        </p:spPr>
-        <p:txBody>
-          <a:bodyPr wrap="square" lIns="0" tIns="0" rIns="0" bIns="0" rtlCol="0" anchor="ctr"/>
-          <a:lstStyle/>
+              <a:t>Complete a truth table for</a:t>
+            </a:r>
+            <a:endParaRPr lang="en-US" sz="1200" dirty="0"/>
+          </a:p>
           <a:p>
             <a:pPr indent="0" marL="0">
-              <a:buNone/>
-            </a:pPr>
-            <a:r>
-              <a:rPr lang="en-US" sz="1600" dirty="0">
-                <a:solidFill>
-                  <a:srgbClr val="667085"/>
+              <a:lnSpc>
+                <a:spcPct val="118000"/>
+              </a:lnSpc>
+              <a:buNone/>
+            </a:pPr>
+            <a:endParaRPr lang="en-US" sz="1200" dirty="0"/>
+          </a:p>
+          <a:p>
+            <a:pPr indent="0" marL="0">
+              <a:lnSpc>
+                <a:spcPct val="118000"/>
+              </a:lnSpc>
+              <a:buNone/>
+            </a:pPr>
+            <a:r>
+              <a:rPr lang="en-US" sz="1200" dirty="0">
+                <a:solidFill>
+                  <a:srgbClr val="101828"/>
                 </a:solidFill>
                 <a:latin typeface="IBM Plex Sans" pitchFamily="34" charset="0"/>
                 <a:ea typeface="IBM Plex Sans" pitchFamily="34" charset="-122"/>
                 <a:cs typeface="IBM Plex Sans" pitchFamily="34" charset="-120"/>
               </a:rPr>
-              <a:t>Predict on paper first, then look down and test it.</a:t>
-            </a:r>
-            <a:endParaRPr lang="en-US" sz="1600" dirty="0"/>
+              <a:t>Q = A OR (NOT B)</a:t>
+            </a:r>
+            <a:endParaRPr lang="en-US" sz="1200" dirty="0"/>
+          </a:p>
+        </p:txBody>
+      </p:sp>
+      <p:sp>
+        <p:nvSpPr>
+          <p:cNvPr id="10" name="Shape 8"/>
+          <p:cNvSpPr/>
+          <p:nvPr/>
+        </p:nvSpPr>
+        <p:spPr>
+          <a:xfrm>
+            <a:off x="4297680" y="1719072"/>
+            <a:ext cx="3566160" cy="2351853"/>
+          </a:xfrm>
+          <a:prstGeom prst="roundRect">
+            <a:avLst>
+              <a:gd name="adj" fmla="val 4666"/>
+            </a:avLst>
+          </a:prstGeom>
+          <a:solidFill>
+            <a:srgbClr val="FFFFFF"/>
+          </a:solidFill>
+          <a:ln w="15875">
+            <a:solidFill>
+              <a:srgbClr val="D9DEE7"/>
+            </a:solidFill>
+            <a:prstDash val="solid"/>
+          </a:ln>
+        </p:spPr>
+      </p:sp>
+      <p:sp>
+        <p:nvSpPr>
+          <p:cNvPr id="11" name="Text 9"/>
+          <p:cNvSpPr txBox="1"/>
+          <p:nvPr/>
+        </p:nvSpPr>
+        <p:spPr>
+          <a:xfrm>
+            <a:off x="4572000" y="1883664"/>
+            <a:ext cx="3017520" cy="292608"/>
+          </a:xfrm>
+          <a:prstGeom prst="rect">
+            <a:avLst/>
+          </a:prstGeom>
+          <a:noFill/>
+          <a:ln/>
+        </p:spPr>
+        <p:txBody>
+          <a:bodyPr wrap="square" lIns="0" tIns="0" rIns="0" bIns="0" rtlCol="0" anchor="ctr"/>
+          <a:lstStyle/>
+          <a:p>
+            <a:pPr indent="0" marL="0">
+              <a:buNone/>
+            </a:pPr>
+            <a:r>
+              <a:rPr lang="en-US" sz="1100" b="1" dirty="0">
+                <a:solidFill>
+                  <a:srgbClr val="667085"/>
+                </a:solidFill>
+                <a:latin typeface="IBM Plex Mono" pitchFamily="34" charset="0"/>
+                <a:ea typeface="IBM Plex Mono" pitchFamily="34" charset="-122"/>
+                <a:cs typeface="IBM Plex Mono" pitchFamily="34" charset="-120"/>
+              </a:rPr>
+              <a:t>WHAT I'M THINKING</a:t>
+            </a:r>
+            <a:endParaRPr lang="en-US" sz="1100" dirty="0"/>
+          </a:p>
+        </p:txBody>
+      </p:sp>
+      <p:sp>
+        <p:nvSpPr>
+          <p:cNvPr id="12" name="Text 10"/>
+          <p:cNvSpPr txBox="1"/>
+          <p:nvPr/>
+        </p:nvSpPr>
+        <p:spPr>
+          <a:xfrm>
+            <a:off x="4572000" y="2231136"/>
+            <a:ext cx="3017520" cy="1693485"/>
+          </a:xfrm>
+          <a:prstGeom prst="rect">
+            <a:avLst/>
+          </a:prstGeom>
+          <a:noFill/>
+          <a:ln/>
+        </p:spPr>
+        <p:txBody>
+          <a:bodyPr wrap="square" lIns="0" tIns="0" rIns="0" bIns="0" rtlCol="0" anchor="t"/>
+          <a:lstStyle/>
+          <a:p>
+            <a:pPr indent="0" marL="0">
+              <a:lnSpc>
+                <a:spcPct val="118000"/>
+              </a:lnSpc>
+              <a:buNone/>
+            </a:pPr>
+            <a:r>
+              <a:rPr lang="en-US" sz="1200" dirty="0">
+                <a:solidFill>
+                  <a:srgbClr val="101828"/>
+                </a:solidFill>
+                <a:latin typeface="IBM Plex Sans" pitchFamily="34" charset="0"/>
+                <a:ea typeface="IBM Plex Sans" pitchFamily="34" charset="-122"/>
+                <a:cs typeface="IBM Plex Sans" pitchFamily="34" charset="-120"/>
+              </a:rPr>
+              <a:t>Two inputs, so 2 x 2 = 4 rows. Always count the rows first.</a:t>
+            </a:r>
+            <a:endParaRPr lang="en-US" sz="1200" dirty="0"/>
+          </a:p>
+          <a:p>
+            <a:pPr indent="0" marL="0">
+              <a:lnSpc>
+                <a:spcPct val="118000"/>
+              </a:lnSpc>
+              <a:buNone/>
+            </a:pPr>
+            <a:endParaRPr lang="en-US" sz="1200" dirty="0"/>
+          </a:p>
+          <a:p>
+            <a:pPr indent="0" marL="0">
+              <a:lnSpc>
+                <a:spcPct val="118000"/>
+              </a:lnSpc>
+              <a:buNone/>
+            </a:pPr>
+            <a:r>
+              <a:rPr lang="en-US" sz="1200" dirty="0">
+                <a:solidFill>
+                  <a:srgbClr val="101828"/>
+                </a:solidFill>
+                <a:latin typeface="IBM Plex Sans" pitchFamily="34" charset="0"/>
+                <a:ea typeface="IBM Plex Sans" pitchFamily="34" charset="-122"/>
+                <a:cs typeface="IBM Plex Sans" pitchFamily="34" charset="-120"/>
+              </a:rPr>
+              <a:t>The brackets go first, so NOT B is a column of its own before Q.</a:t>
+            </a:r>
+            <a:endParaRPr lang="en-US" sz="1200" dirty="0"/>
+          </a:p>
+          <a:p>
+            <a:pPr indent="0" marL="0">
+              <a:lnSpc>
+                <a:spcPct val="118000"/>
+              </a:lnSpc>
+              <a:buNone/>
+            </a:pPr>
+            <a:endParaRPr lang="en-US" sz="1200" dirty="0"/>
+          </a:p>
+          <a:p>
+            <a:pPr indent="0" marL="0">
+              <a:lnSpc>
+                <a:spcPct val="118000"/>
+              </a:lnSpc>
+              <a:buNone/>
+            </a:pPr>
+            <a:r>
+              <a:rPr lang="en-US" sz="1200" dirty="0">
+                <a:solidFill>
+                  <a:srgbClr val="101828"/>
+                </a:solidFill>
+                <a:latin typeface="IBM Plex Sans" pitchFamily="34" charset="0"/>
+                <a:ea typeface="IBM Plex Sans" pitchFamily="34" charset="-122"/>
+                <a:cs typeface="IBM Plex Sans" pitchFamily="34" charset="-120"/>
+              </a:rPr>
+              <a:t>An extra column is free marks, not extra work.</a:t>
+            </a:r>
+            <a:endParaRPr lang="en-US" sz="1200" dirty="0"/>
+          </a:p>
+        </p:txBody>
+      </p:sp>
+      <p:sp>
+        <p:nvSpPr>
+          <p:cNvPr id="13" name="Shape 11"/>
+          <p:cNvSpPr/>
+          <p:nvPr/>
+        </p:nvSpPr>
+        <p:spPr>
+          <a:xfrm>
+            <a:off x="8092440" y="1719072"/>
+            <a:ext cx="3566160" cy="2351853"/>
+          </a:xfrm>
+          <a:prstGeom prst="roundRect">
+            <a:avLst>
+              <a:gd name="adj" fmla="val 4666"/>
+            </a:avLst>
+          </a:prstGeom>
+          <a:solidFill>
+            <a:srgbClr val="FFFFFF"/>
+          </a:solidFill>
+          <a:ln w="15875">
+            <a:solidFill>
+              <a:srgbClr val="D9DEE7"/>
+            </a:solidFill>
+            <a:prstDash val="solid"/>
+          </a:ln>
+        </p:spPr>
+      </p:sp>
+      <p:sp>
+        <p:nvSpPr>
+          <p:cNvPr id="14" name="Text 12"/>
+          <p:cNvSpPr txBox="1"/>
+          <p:nvPr/>
+        </p:nvSpPr>
+        <p:spPr>
+          <a:xfrm>
+            <a:off x="8366760" y="1883664"/>
+            <a:ext cx="3017520" cy="292608"/>
+          </a:xfrm>
+          <a:prstGeom prst="rect">
+            <a:avLst/>
+          </a:prstGeom>
+          <a:noFill/>
+          <a:ln/>
+        </p:spPr>
+        <p:txBody>
+          <a:bodyPr wrap="square" lIns="0" tIns="0" rIns="0" bIns="0" rtlCol="0" anchor="ctr"/>
+          <a:lstStyle/>
+          <a:p>
+            <a:pPr indent="0" marL="0">
+              <a:buNone/>
+            </a:pPr>
+            <a:r>
+              <a:rPr lang="en-US" sz="1100" b="1" dirty="0">
+                <a:solidFill>
+                  <a:srgbClr val="667085"/>
+                </a:solidFill>
+                <a:latin typeface="IBM Plex Mono" pitchFamily="34" charset="0"/>
+                <a:ea typeface="IBM Plex Mono" pitchFamily="34" charset="-122"/>
+                <a:cs typeface="IBM Plex Mono" pitchFamily="34" charset="-120"/>
+              </a:rPr>
+              <a:t>HOW I BUILD IT</a:t>
+            </a:r>
+            <a:endParaRPr lang="en-US" sz="1100" dirty="0"/>
+          </a:p>
+        </p:txBody>
+      </p:sp>
+      <p:sp>
+        <p:nvSpPr>
+          <p:cNvPr id="15" name="Text 13"/>
+          <p:cNvSpPr txBox="1"/>
+          <p:nvPr/>
+        </p:nvSpPr>
+        <p:spPr>
+          <a:xfrm>
+            <a:off x="8366760" y="2231136"/>
+            <a:ext cx="3017520" cy="1693485"/>
+          </a:xfrm>
+          <a:prstGeom prst="rect">
+            <a:avLst/>
+          </a:prstGeom>
+          <a:noFill/>
+          <a:ln/>
+        </p:spPr>
+        <p:txBody>
+          <a:bodyPr wrap="square" lIns="0" tIns="0" rIns="0" bIns="0" rtlCol="0" anchor="t"/>
+          <a:lstStyle/>
+          <a:p>
+            <a:pPr indent="0" marL="0">
+              <a:lnSpc>
+                <a:spcPct val="118000"/>
+              </a:lnSpc>
+              <a:buNone/>
+            </a:pPr>
+            <a:r>
+              <a:rPr lang="en-US" sz="1200" dirty="0">
+                <a:solidFill>
+                  <a:srgbClr val="101828"/>
+                </a:solidFill>
+                <a:latin typeface="IBM Plex Sans" pitchFamily="34" charset="0"/>
+                <a:ea typeface="IBM Plex Sans" pitchFamily="34" charset="-122"/>
+                <a:cs typeface="IBM Plex Sans" pitchFamily="34" charset="-120"/>
+              </a:rPr>
+              <a:t>List A and B in binary counting order: 00, 01, 10, 11. Never invent an order.</a:t>
+            </a:r>
+            <a:endParaRPr lang="en-US" sz="1200" dirty="0"/>
+          </a:p>
+          <a:p>
+            <a:pPr indent="0" marL="0">
+              <a:lnSpc>
+                <a:spcPct val="118000"/>
+              </a:lnSpc>
+              <a:buNone/>
+            </a:pPr>
+            <a:endParaRPr lang="en-US" sz="1200" dirty="0"/>
+          </a:p>
+          <a:p>
+            <a:pPr indent="0" marL="0">
+              <a:lnSpc>
+                <a:spcPct val="118000"/>
+              </a:lnSpc>
+              <a:buNone/>
+            </a:pPr>
+            <a:r>
+              <a:rPr lang="en-US" sz="1200" dirty="0">
+                <a:solidFill>
+                  <a:srgbClr val="101828"/>
+                </a:solidFill>
+                <a:latin typeface="IBM Plex Sans" pitchFamily="34" charset="0"/>
+                <a:ea typeface="IBM Plex Sans" pitchFamily="34" charset="-122"/>
+                <a:cs typeface="IBM Plex Sans" pitchFamily="34" charset="-120"/>
+              </a:rPr>
+              <a:t>Fill NOT B by flipping B.</a:t>
+            </a:r>
+            <a:endParaRPr lang="en-US" sz="1200" dirty="0"/>
+          </a:p>
+          <a:p>
+            <a:pPr indent="0" marL="0">
+              <a:lnSpc>
+                <a:spcPct val="118000"/>
+              </a:lnSpc>
+              <a:buNone/>
+            </a:pPr>
+            <a:endParaRPr lang="en-US" sz="1200" dirty="0"/>
+          </a:p>
+          <a:p>
+            <a:pPr indent="0" marL="0">
+              <a:lnSpc>
+                <a:spcPct val="118000"/>
+              </a:lnSpc>
+              <a:buNone/>
+            </a:pPr>
+            <a:r>
+              <a:rPr lang="en-US" sz="1200" dirty="0">
+                <a:solidFill>
+                  <a:srgbClr val="101828"/>
+                </a:solidFill>
+                <a:latin typeface="IBM Plex Sans" pitchFamily="34" charset="0"/>
+                <a:ea typeface="IBM Plex Sans" pitchFamily="34" charset="-122"/>
+                <a:cs typeface="IBM Plex Sans" pitchFamily="34" charset="-120"/>
+              </a:rPr>
+              <a:t>Then Q = A OR (NOT B): 1 if either side is 1.</a:t>
+            </a:r>
+            <a:endParaRPr lang="en-US" sz="1200" dirty="0"/>
+          </a:p>
+        </p:txBody>
+      </p:sp>
+      <p:sp>
+        <p:nvSpPr>
+          <p:cNvPr id="16" name="Shape 14"/>
+          <p:cNvSpPr/>
+          <p:nvPr/>
+        </p:nvSpPr>
+        <p:spPr>
+          <a:xfrm>
+            <a:off x="502920" y="4208085"/>
+            <a:ext cx="11155680" cy="2128707"/>
+          </a:xfrm>
+          <a:prstGeom prst="roundRect">
+            <a:avLst>
+              <a:gd name="adj" fmla="val 5155"/>
+            </a:avLst>
+          </a:prstGeom>
+          <a:solidFill>
+            <a:srgbClr val="FFFFFF"/>
+          </a:solidFill>
+          <a:ln w="15875">
+            <a:solidFill>
+              <a:srgbClr val="08A6A6"/>
+            </a:solidFill>
+            <a:prstDash val="solid"/>
+          </a:ln>
+        </p:spPr>
+      </p:sp>
+      <p:sp>
+        <p:nvSpPr>
+          <p:cNvPr id="17" name="Text 15"/>
+          <p:cNvSpPr txBox="1"/>
+          <p:nvPr/>
+        </p:nvSpPr>
+        <p:spPr>
+          <a:xfrm>
+            <a:off x="868680" y="4372677"/>
+            <a:ext cx="10424160" cy="292608"/>
+          </a:xfrm>
+          <a:prstGeom prst="rect">
+            <a:avLst/>
+          </a:prstGeom>
+          <a:noFill/>
+          <a:ln/>
+        </p:spPr>
+        <p:txBody>
+          <a:bodyPr wrap="square" lIns="0" tIns="0" rIns="0" bIns="0" rtlCol="0" anchor="ctr"/>
+          <a:lstStyle/>
+          <a:p>
+            <a:pPr indent="0" marL="0">
+              <a:buNone/>
+            </a:pPr>
+            <a:r>
+              <a:rPr lang="en-US" sz="1100" b="1" dirty="0">
+                <a:solidFill>
+                  <a:srgbClr val="08A6A6"/>
+                </a:solidFill>
+                <a:latin typeface="IBM Plex Mono" pitchFamily="34" charset="0"/>
+                <a:ea typeface="IBM Plex Mono" pitchFamily="34" charset="-122"/>
+                <a:cs typeface="IBM Plex Mono" pitchFamily="34" charset="-120"/>
+              </a:rPr>
+              <a:t>THE FINISHED TABLE</a:t>
+            </a:r>
+            <a:endParaRPr lang="en-US" sz="1100" dirty="0"/>
+          </a:p>
+        </p:txBody>
+      </p:sp>
+      <p:sp>
+        <p:nvSpPr>
+          <p:cNvPr id="18" name="Text 16"/>
+          <p:cNvSpPr txBox="1"/>
+          <p:nvPr/>
+        </p:nvSpPr>
+        <p:spPr>
+          <a:xfrm>
+            <a:off x="868680" y="4720149"/>
+            <a:ext cx="10424160" cy="1506915"/>
+          </a:xfrm>
+          <a:prstGeom prst="rect">
+            <a:avLst/>
+          </a:prstGeom>
+          <a:noFill/>
+          <a:ln/>
+        </p:spPr>
+        <p:txBody>
+          <a:bodyPr wrap="square" lIns="0" tIns="0" rIns="0" bIns="0" rtlCol="0" anchor="t"/>
+          <a:lstStyle/>
+          <a:p>
+            <a:pPr indent="0" marL="0">
+              <a:lnSpc>
+                <a:spcPct val="120000"/>
+              </a:lnSpc>
+              <a:buNone/>
+            </a:pPr>
+            <a:r>
+              <a:rPr lang="en-US" sz="1200" dirty="0">
+                <a:solidFill>
+                  <a:srgbClr val="101828"/>
+                </a:solidFill>
+                <a:latin typeface="IBM Plex Sans" pitchFamily="34" charset="0"/>
+                <a:ea typeface="IBM Plex Sans" pitchFamily="34" charset="-122"/>
+                <a:cs typeface="IBM Plex Sans" pitchFamily="34" charset="-120"/>
+              </a:rPr>
+              <a:t>A    B    NOT B    Q = A OR (NOT B)</a:t>
+            </a:r>
+            <a:endParaRPr lang="en-US" sz="1200" dirty="0"/>
+          </a:p>
+          <a:p>
+            <a:pPr indent="0" marL="0">
+              <a:lnSpc>
+                <a:spcPct val="120000"/>
+              </a:lnSpc>
+              <a:buNone/>
+            </a:pPr>
+            <a:r>
+              <a:rPr lang="en-US" sz="1200" dirty="0">
+                <a:solidFill>
+                  <a:srgbClr val="101828"/>
+                </a:solidFill>
+                <a:latin typeface="IBM Plex Sans" pitchFamily="34" charset="0"/>
+                <a:ea typeface="IBM Plex Sans" pitchFamily="34" charset="-122"/>
+                <a:cs typeface="IBM Plex Sans" pitchFamily="34" charset="-120"/>
+              </a:rPr>
+              <a:t>0    0      1              1</a:t>
+            </a:r>
+            <a:endParaRPr lang="en-US" sz="1200" dirty="0"/>
+          </a:p>
+          <a:p>
+            <a:pPr indent="0" marL="0">
+              <a:lnSpc>
+                <a:spcPct val="120000"/>
+              </a:lnSpc>
+              <a:buNone/>
+            </a:pPr>
+            <a:r>
+              <a:rPr lang="en-US" sz="1200" dirty="0">
+                <a:solidFill>
+                  <a:srgbClr val="101828"/>
+                </a:solidFill>
+                <a:latin typeface="IBM Plex Sans" pitchFamily="34" charset="0"/>
+                <a:ea typeface="IBM Plex Sans" pitchFamily="34" charset="-122"/>
+                <a:cs typeface="IBM Plex Sans" pitchFamily="34" charset="-120"/>
+              </a:rPr>
+              <a:t>0    1      0              0</a:t>
+            </a:r>
+            <a:endParaRPr lang="en-US" sz="1200" dirty="0"/>
+          </a:p>
+          <a:p>
+            <a:pPr indent="0" marL="0">
+              <a:lnSpc>
+                <a:spcPct val="120000"/>
+              </a:lnSpc>
+              <a:buNone/>
+            </a:pPr>
+            <a:r>
+              <a:rPr lang="en-US" sz="1200" dirty="0">
+                <a:solidFill>
+                  <a:srgbClr val="101828"/>
+                </a:solidFill>
+                <a:latin typeface="IBM Plex Sans" pitchFamily="34" charset="0"/>
+                <a:ea typeface="IBM Plex Sans" pitchFamily="34" charset="-122"/>
+                <a:cs typeface="IBM Plex Sans" pitchFamily="34" charset="-120"/>
+              </a:rPr>
+              <a:t>1    0      1              1</a:t>
+            </a:r>
+            <a:endParaRPr lang="en-US" sz="1200" dirty="0"/>
+          </a:p>
+          <a:p>
+            <a:pPr indent="0" marL="0">
+              <a:lnSpc>
+                <a:spcPct val="120000"/>
+              </a:lnSpc>
+              <a:buNone/>
+            </a:pPr>
+            <a:r>
+              <a:rPr lang="en-US" sz="1200" dirty="0">
+                <a:solidFill>
+                  <a:srgbClr val="101828"/>
+                </a:solidFill>
+                <a:latin typeface="IBM Plex Sans" pitchFamily="34" charset="0"/>
+                <a:ea typeface="IBM Plex Sans" pitchFamily="34" charset="-122"/>
+                <a:cs typeface="IBM Plex Sans" pitchFamily="34" charset="-120"/>
+              </a:rPr>
+              <a:t>1    1      0              1</a:t>
+            </a:r>
+            <a:endParaRPr lang="en-US" sz="1200" dirty="0"/>
+          </a:p>
+          <a:p>
+            <a:pPr indent="0" marL="0">
+              <a:lnSpc>
+                <a:spcPct val="120000"/>
+              </a:lnSpc>
+              <a:buNone/>
+            </a:pPr>
+            <a:endParaRPr lang="en-US" sz="1200" dirty="0"/>
+          </a:p>
+          <a:p>
+            <a:pPr indent="0" marL="0">
+              <a:lnSpc>
+                <a:spcPct val="120000"/>
+              </a:lnSpc>
+              <a:buNone/>
+            </a:pPr>
+            <a:r>
+              <a:rPr lang="en-US" sz="1200" dirty="0">
+                <a:solidFill>
+                  <a:srgbClr val="101828"/>
+                </a:solidFill>
+                <a:latin typeface="IBM Plex Sans" pitchFamily="34" charset="0"/>
+                <a:ea typeface="IBM Plex Sans" pitchFamily="34" charset="-122"/>
+                <a:cs typeface="IBM Plex Sans" pitchFamily="34" charset="-120"/>
+              </a:rPr>
+              <a:t>Only one row gives 0, and it is the row where A is off and B is on.</a:t>
+            </a:r>
+            <a:endParaRPr lang="en-US" sz="1200" dirty="0"/>
           </a:p>
         </p:txBody>
       </p:sp>
@@ -3281,14 +4024,75 @@
       </p:sp>
       <p:sp>
         <p:nvSpPr>
-          <p:cNvPr id="5" name="Text 3"/>
-          <p:cNvSpPr txBox="1"/>
-          <p:nvPr/>
-        </p:nvSpPr>
-        <p:spPr>
-          <a:xfrm>
-            <a:off x="502920" y="411480"/>
-            <a:ext cx="11155680" cy="777240"/>
+          <p:cNvPr id="5" name="Shape 3"/>
+          <p:cNvSpPr/>
+          <p:nvPr/>
+        </p:nvSpPr>
+        <p:spPr>
+          <a:xfrm>
+            <a:off x="502920" y="457200"/>
+            <a:ext cx="1051560" cy="420624"/>
+          </a:xfrm>
+          <a:prstGeom prst="roundRect">
+            <a:avLst>
+              <a:gd name="adj" fmla="val 21739"/>
+            </a:avLst>
+          </a:prstGeom>
+          <a:solidFill>
+            <a:srgbClr val="F4B942"/>
+          </a:solidFill>
+          <a:ln/>
+        </p:spPr>
+      </p:sp>
+      <p:sp>
+        <p:nvSpPr>
+          <p:cNvPr id="6" name="Text 4"/>
+          <p:cNvSpPr txBox="1"/>
+          <p:nvPr/>
+        </p:nvSpPr>
+        <p:spPr>
+          <a:xfrm>
+            <a:off x="502920" y="457200"/>
+            <a:ext cx="1051560" cy="420624"/>
+          </a:xfrm>
+          <a:prstGeom prst="rect">
+            <a:avLst/>
+          </a:prstGeom>
+          <a:noFill/>
+          <a:ln/>
+        </p:spPr>
+        <p:txBody>
+          <a:bodyPr wrap="square" lIns="0" tIns="0" rIns="0" bIns="0" rtlCol="0" anchor="ctr"/>
+          <a:lstStyle/>
+          <a:p>
+            <a:pPr algn="ctr" indent="0" marL="0">
+              <a:buNone/>
+            </a:pPr>
+            <a:r>
+              <a:rPr lang="en-US" sz="1200" b="1" dirty="0">
+                <a:solidFill>
+                  <a:srgbClr val="101828"/>
+                </a:solidFill>
+                <a:latin typeface="IBM Plex Mono" pitchFamily="34" charset="0"/>
+                <a:ea typeface="IBM Plex Mono" pitchFamily="34" charset="-122"/>
+                <a:cs typeface="IBM Plex Mono" pitchFamily="34" charset="-120"/>
+              </a:rPr>
+              <a:t>CHECK</a:t>
+            </a:r>
+            <a:endParaRPr lang="en-US" sz="1200" dirty="0"/>
+          </a:p>
+        </p:txBody>
+      </p:sp>
+      <p:sp>
+        <p:nvSpPr>
+          <p:cNvPr id="7" name="Text 5"/>
+          <p:cNvSpPr txBox="1"/>
+          <p:nvPr/>
+        </p:nvSpPr>
+        <p:spPr>
+          <a:xfrm>
+            <a:off x="1737360" y="457200"/>
+            <a:ext cx="9875520" cy="420624"/>
           </a:xfrm>
           <a:prstGeom prst="rect">
             <a:avLst/>
@@ -3304,30 +4108,30 @@
               <a:buNone/>
             </a:pPr>
             <a:r>
-              <a:rPr lang="en-US" sz="3200" b="1" dirty="0">
-                <a:solidFill>
-                  <a:srgbClr val="101828"/>
+              <a:rPr lang="en-US" sz="1500" dirty="0">
+                <a:solidFill>
+                  <a:srgbClr val="667085"/>
                 </a:solidFill>
                 <a:latin typeface="IBM Plex Sans" pitchFamily="34" charset="0"/>
                 <a:ea typeface="IBM Plex Sans" pitchFamily="34" charset="-122"/>
                 <a:cs typeface="IBM Plex Sans" pitchFamily="34" charset="-120"/>
               </a:rPr>
-              <a:t>Worth knowing</a:t>
-            </a:r>
-            <a:endParaRPr lang="en-US" sz="3200" dirty="0"/>
-          </a:p>
-        </p:txBody>
-      </p:sp>
-      <p:sp>
-        <p:nvSpPr>
-          <p:cNvPr id="6" name="Text 4"/>
-          <p:cNvSpPr txBox="1"/>
-          <p:nvPr/>
-        </p:nvSpPr>
-        <p:spPr>
-          <a:xfrm>
-            <a:off x="502920" y="1170432"/>
-            <a:ext cx="11155680" cy="411480"/>
+              <a:t>Hands down. Everyone commits.</a:t>
+            </a:r>
+            <a:endParaRPr lang="en-US" sz="1500" dirty="0"/>
+          </a:p>
+        </p:txBody>
+      </p:sp>
+      <p:sp>
+        <p:nvSpPr>
+          <p:cNvPr id="8" name="Text 6"/>
+          <p:cNvSpPr txBox="1"/>
+          <p:nvPr/>
+        </p:nvSpPr>
+        <p:spPr>
+          <a:xfrm>
+            <a:off x="502920" y="1097280"/>
+            <a:ext cx="11155680" cy="914400"/>
           </a:xfrm>
           <a:prstGeom prst="rect">
             <a:avLst/>
@@ -3340,37 +4144,40 @@
           <a:lstStyle/>
           <a:p>
             <a:pPr indent="0" marL="0">
-              <a:buNone/>
-            </a:pPr>
-            <a:r>
-              <a:rPr lang="en-US" sz="1500" dirty="0">
-                <a:solidFill>
-                  <a:srgbClr val="667085"/>
+              <a:lnSpc>
+                <a:spcPct val="115000"/>
+              </a:lnSpc>
+              <a:buNone/>
+            </a:pPr>
+            <a:r>
+              <a:rPr lang="en-US" sz="2600" b="1" dirty="0">
+                <a:solidFill>
+                  <a:srgbClr val="101828"/>
                 </a:solidFill>
                 <a:latin typeface="IBM Plex Sans" pitchFamily="34" charset="0"/>
                 <a:ea typeface="IBM Plex Sans" pitchFamily="34" charset="-122"/>
                 <a:cs typeface="IBM Plex Sans" pitchFamily="34" charset="-120"/>
               </a:rPr>
-              <a:t>The information markers dotted around the room</a:t>
-            </a:r>
-            <a:endParaRPr lang="en-US" sz="1500" dirty="0"/>
-          </a:p>
-        </p:txBody>
-      </p:sp>
-      <p:sp>
-        <p:nvSpPr>
-          <p:cNvPr id="7" name="Shape 5"/>
+              <a:t>Two switches in series control a bulb. Which gate does this represent?</a:t>
+            </a:r>
+            <a:endParaRPr lang="en-US" sz="2600" dirty="0"/>
+          </a:p>
+        </p:txBody>
+      </p:sp>
+      <p:sp>
+        <p:nvSpPr>
+          <p:cNvPr id="9" name="Shape 7"/>
           <p:cNvSpPr/>
           <p:nvPr/>
         </p:nvSpPr>
         <p:spPr>
           <a:xfrm>
-            <a:off x="502920" y="1828800"/>
-            <a:ext cx="5394960" cy="1737360"/>
+            <a:off x="502920" y="2148840"/>
+            <a:ext cx="11155680" cy="731520"/>
           </a:xfrm>
           <a:prstGeom prst="roundRect">
             <a:avLst>
-              <a:gd name="adj" fmla="val 6316"/>
+              <a:gd name="adj" fmla="val 15000"/>
             </a:avLst>
           </a:prstGeom>
           <a:solidFill>
@@ -3378,7 +4185,7 @@
           </a:solidFill>
           <a:ln w="15875">
             <a:solidFill>
-              <a:srgbClr val="2D63FF"/>
+              <a:srgbClr val="D9DEE7"/>
             </a:solidFill>
             <a:prstDash val="solid"/>
           </a:ln>
@@ -3386,14 +4193,75 @@
       </p:sp>
       <p:sp>
         <p:nvSpPr>
-          <p:cNvPr id="8" name="Text 6"/>
-          <p:cNvSpPr txBox="1"/>
-          <p:nvPr/>
-        </p:nvSpPr>
-        <p:spPr>
-          <a:xfrm>
-            <a:off x="822960" y="2011680"/>
-            <a:ext cx="4754880" cy="365760"/>
+          <p:cNvPr id="10" name="Shape 8"/>
+          <p:cNvSpPr/>
+          <p:nvPr/>
+        </p:nvSpPr>
+        <p:spPr>
+          <a:xfrm>
+            <a:off x="777240" y="2295144"/>
+            <a:ext cx="438912" cy="438912"/>
+          </a:xfrm>
+          <a:prstGeom prst="roundRect">
+            <a:avLst>
+              <a:gd name="adj" fmla="val 20833"/>
+            </a:avLst>
+          </a:prstGeom>
+          <a:solidFill>
+            <a:srgbClr val="EEF2FB"/>
+          </a:solidFill>
+          <a:ln/>
+        </p:spPr>
+      </p:sp>
+      <p:sp>
+        <p:nvSpPr>
+          <p:cNvPr id="11" name="Text 9"/>
+          <p:cNvSpPr txBox="1"/>
+          <p:nvPr/>
+        </p:nvSpPr>
+        <p:spPr>
+          <a:xfrm>
+            <a:off x="777240" y="2295144"/>
+            <a:ext cx="438912" cy="438912"/>
+          </a:xfrm>
+          <a:prstGeom prst="rect">
+            <a:avLst/>
+          </a:prstGeom>
+          <a:noFill/>
+          <a:ln/>
+        </p:spPr>
+        <p:txBody>
+          <a:bodyPr wrap="square" lIns="0" tIns="0" rIns="0" bIns="0" rtlCol="0" anchor="ctr"/>
+          <a:lstStyle/>
+          <a:p>
+            <a:pPr algn="ctr" indent="0" marL="0">
+              <a:buNone/>
+            </a:pPr>
+            <a:r>
+              <a:rPr lang="en-US" sz="1300" b="1" dirty="0">
+                <a:solidFill>
+                  <a:srgbClr val="2D63FF"/>
+                </a:solidFill>
+                <a:latin typeface="IBM Plex Mono" pitchFamily="34" charset="0"/>
+                <a:ea typeface="IBM Plex Mono" pitchFamily="34" charset="-122"/>
+                <a:cs typeface="IBM Plex Mono" pitchFamily="34" charset="-120"/>
+              </a:rPr>
+              <a:t>A</a:t>
+            </a:r>
+            <a:endParaRPr lang="en-US" sz="1300" dirty="0"/>
+          </a:p>
+        </p:txBody>
+      </p:sp>
+      <p:sp>
+        <p:nvSpPr>
+          <p:cNvPr id="12" name="Text 10"/>
+          <p:cNvSpPr txBox="1"/>
+          <p:nvPr/>
+        </p:nvSpPr>
+        <p:spPr>
+          <a:xfrm>
+            <a:off x="1417320" y="2148840"/>
+            <a:ext cx="10058400" cy="731520"/>
           </a:xfrm>
           <a:prstGeom prst="rect">
             <a:avLst/>
@@ -3406,79 +4274,40 @@
           <a:lstStyle/>
           <a:p>
             <a:pPr indent="0" marL="0">
-              <a:buNone/>
-            </a:pPr>
-            <a:r>
-              <a:rPr lang="en-US" sz="1600" b="1" dirty="0">
-                <a:solidFill>
-                  <a:srgbClr val="2D63FF"/>
+              <a:lnSpc>
+                <a:spcPct val="115000"/>
+              </a:lnSpc>
+              <a:buNone/>
+            </a:pPr>
+            <a:r>
+              <a:rPr lang="en-US" sz="1700" dirty="0">
+                <a:solidFill>
+                  <a:srgbClr val="101828"/>
                 </a:solidFill>
                 <a:latin typeface="IBM Plex Sans" pitchFamily="34" charset="0"/>
                 <a:ea typeface="IBM Plex Sans" pitchFamily="34" charset="-122"/>
                 <a:cs typeface="IBM Plex Sans" pitchFamily="34" charset="-120"/>
               </a:rPr>
-              <a:t>Binary counting</a:t>
-            </a:r>
-            <a:endParaRPr lang="en-US" sz="1600" dirty="0"/>
-          </a:p>
-        </p:txBody>
-      </p:sp>
-      <p:sp>
-        <p:nvSpPr>
-          <p:cNvPr id="9" name="Text 7"/>
-          <p:cNvSpPr txBox="1"/>
-          <p:nvPr/>
-        </p:nvSpPr>
-        <p:spPr>
-          <a:xfrm>
-            <a:off x="822960" y="2395728"/>
-            <a:ext cx="4754880" cy="1005840"/>
-          </a:xfrm>
-          <a:prstGeom prst="rect">
-            <a:avLst/>
-          </a:prstGeom>
-          <a:noFill/>
-          <a:ln/>
-        </p:spPr>
-        <p:txBody>
-          <a:bodyPr wrap="square" lIns="0" tIns="0" rIns="0" bIns="0" rtlCol="0" anchor="t"/>
-          <a:lstStyle/>
-          <a:p>
-            <a:pPr indent="0" marL="0">
-              <a:lnSpc>
-                <a:spcPct val="120000"/>
-              </a:lnSpc>
-              <a:buNone/>
-            </a:pPr>
-            <a:r>
-              <a:rPr lang="en-US" sz="1300" dirty="0">
-                <a:solidFill>
-                  <a:srgbClr val="667085"/>
-                </a:solidFill>
-                <a:latin typeface="IBM Plex Sans" pitchFamily="34" charset="0"/>
-                <a:ea typeface="IBM Plex Sans" pitchFamily="34" charset="-122"/>
-                <a:cs typeface="IBM Plex Sans" pitchFamily="34" charset="-120"/>
-              </a:rPr>
-              <a:t>The input columns of a truth table are just binary numbers counting up: 000, 001, 010 and so on. That's why there are 2ⁿ rows.</a:t>
-            </a:r>
-            <a:endParaRPr lang="en-US" sz="1300" dirty="0"/>
-          </a:p>
-        </p:txBody>
-      </p:sp>
-      <p:sp>
-        <p:nvSpPr>
-          <p:cNvPr id="10" name="Shape 8"/>
+              <a:t>NOT</a:t>
+            </a:r>
+            <a:endParaRPr lang="en-US" sz="1700" dirty="0"/>
+          </a:p>
+        </p:txBody>
+      </p:sp>
+      <p:sp>
+        <p:nvSpPr>
+          <p:cNvPr id="13" name="Shape 11"/>
           <p:cNvSpPr/>
           <p:nvPr/>
         </p:nvSpPr>
         <p:spPr>
           <a:xfrm>
-            <a:off x="6217920" y="1828800"/>
-            <a:ext cx="5394960" cy="1737360"/>
+            <a:off x="502920" y="3017520"/>
+            <a:ext cx="11155680" cy="731520"/>
           </a:xfrm>
           <a:prstGeom prst="roundRect">
             <a:avLst>
-              <a:gd name="adj" fmla="val 6316"/>
+              <a:gd name="adj" fmla="val 15000"/>
             </a:avLst>
           </a:prstGeom>
           <a:solidFill>
@@ -3486,7 +4315,7 @@
           </a:solidFill>
           <a:ln w="15875">
             <a:solidFill>
-              <a:srgbClr val="08A6A6"/>
+              <a:srgbClr val="D9DEE7"/>
             </a:solidFill>
             <a:prstDash val="solid"/>
           </a:ln>
@@ -3494,14 +4323,75 @@
       </p:sp>
       <p:sp>
         <p:nvSpPr>
-          <p:cNvPr id="11" name="Text 9"/>
-          <p:cNvSpPr txBox="1"/>
-          <p:nvPr/>
-        </p:nvSpPr>
-        <p:spPr>
-          <a:xfrm>
-            <a:off x="6537960" y="2011680"/>
-            <a:ext cx="4754880" cy="365760"/>
+          <p:cNvPr id="14" name="Shape 12"/>
+          <p:cNvSpPr/>
+          <p:nvPr/>
+        </p:nvSpPr>
+        <p:spPr>
+          <a:xfrm>
+            <a:off x="777240" y="3163824"/>
+            <a:ext cx="438912" cy="438912"/>
+          </a:xfrm>
+          <a:prstGeom prst="roundRect">
+            <a:avLst>
+              <a:gd name="adj" fmla="val 20833"/>
+            </a:avLst>
+          </a:prstGeom>
+          <a:solidFill>
+            <a:srgbClr val="EEF2FB"/>
+          </a:solidFill>
+          <a:ln/>
+        </p:spPr>
+      </p:sp>
+      <p:sp>
+        <p:nvSpPr>
+          <p:cNvPr id="15" name="Text 13"/>
+          <p:cNvSpPr txBox="1"/>
+          <p:nvPr/>
+        </p:nvSpPr>
+        <p:spPr>
+          <a:xfrm>
+            <a:off x="777240" y="3163824"/>
+            <a:ext cx="438912" cy="438912"/>
+          </a:xfrm>
+          <a:prstGeom prst="rect">
+            <a:avLst/>
+          </a:prstGeom>
+          <a:noFill/>
+          <a:ln/>
+        </p:spPr>
+        <p:txBody>
+          <a:bodyPr wrap="square" lIns="0" tIns="0" rIns="0" bIns="0" rtlCol="0" anchor="ctr"/>
+          <a:lstStyle/>
+          <a:p>
+            <a:pPr algn="ctr" indent="0" marL="0">
+              <a:buNone/>
+            </a:pPr>
+            <a:r>
+              <a:rPr lang="en-US" sz="1300" b="1" dirty="0">
+                <a:solidFill>
+                  <a:srgbClr val="2D63FF"/>
+                </a:solidFill>
+                <a:latin typeface="IBM Plex Mono" pitchFamily="34" charset="0"/>
+                <a:ea typeface="IBM Plex Mono" pitchFamily="34" charset="-122"/>
+                <a:cs typeface="IBM Plex Mono" pitchFamily="34" charset="-120"/>
+              </a:rPr>
+              <a:t>B</a:t>
+            </a:r>
+            <a:endParaRPr lang="en-US" sz="1300" dirty="0"/>
+          </a:p>
+        </p:txBody>
+      </p:sp>
+      <p:sp>
+        <p:nvSpPr>
+          <p:cNvPr id="16" name="Text 14"/>
+          <p:cNvSpPr txBox="1"/>
+          <p:nvPr/>
+        </p:nvSpPr>
+        <p:spPr>
+          <a:xfrm>
+            <a:off x="1417320" y="3017520"/>
+            <a:ext cx="10058400" cy="731520"/>
           </a:xfrm>
           <a:prstGeom prst="rect">
             <a:avLst/>
@@ -3514,79 +4404,40 @@
           <a:lstStyle/>
           <a:p>
             <a:pPr indent="0" marL="0">
-              <a:buNone/>
-            </a:pPr>
-            <a:r>
-              <a:rPr lang="en-US" sz="1600" b="1" dirty="0">
-                <a:solidFill>
-                  <a:srgbClr val="08A6A6"/>
+              <a:lnSpc>
+                <a:spcPct val="115000"/>
+              </a:lnSpc>
+              <a:buNone/>
+            </a:pPr>
+            <a:r>
+              <a:rPr lang="en-US" sz="1700" dirty="0">
+                <a:solidFill>
+                  <a:srgbClr val="101828"/>
                 </a:solidFill>
                 <a:latin typeface="IBM Plex Sans" pitchFamily="34" charset="0"/>
                 <a:ea typeface="IBM Plex Sans" pitchFamily="34" charset="-122"/>
                 <a:cs typeface="IBM Plex Sans" pitchFamily="34" charset="-120"/>
               </a:rPr>
-              <a:t>De Morgan's law</a:t>
-            </a:r>
-            <a:endParaRPr lang="en-US" sz="1600" dirty="0"/>
-          </a:p>
-        </p:txBody>
-      </p:sp>
-      <p:sp>
-        <p:nvSpPr>
-          <p:cNvPr id="12" name="Text 10"/>
-          <p:cNvSpPr txBox="1"/>
-          <p:nvPr/>
-        </p:nvSpPr>
-        <p:spPr>
-          <a:xfrm>
-            <a:off x="6537960" y="2395728"/>
-            <a:ext cx="4754880" cy="1005840"/>
-          </a:xfrm>
-          <a:prstGeom prst="rect">
-            <a:avLst/>
-          </a:prstGeom>
-          <a:noFill/>
-          <a:ln/>
-        </p:spPr>
-        <p:txBody>
-          <a:bodyPr wrap="square" lIns="0" tIns="0" rIns="0" bIns="0" rtlCol="0" anchor="t"/>
-          <a:lstStyle/>
-          <a:p>
-            <a:pPr indent="0" marL="0">
-              <a:lnSpc>
-                <a:spcPct val="120000"/>
-              </a:lnSpc>
-              <a:buNone/>
-            </a:pPr>
-            <a:r>
-              <a:rPr lang="en-US" sz="1300" dirty="0">
-                <a:solidFill>
-                  <a:srgbClr val="667085"/>
-                </a:solidFill>
-                <a:latin typeface="IBM Plex Sans" pitchFamily="34" charset="0"/>
-                <a:ea typeface="IBM Plex Sans" pitchFamily="34" charset="-122"/>
-                <a:cs typeface="IBM Plex Sans" pitchFamily="34" charset="-120"/>
-              </a:rPr>
-              <a:t>NOT (A AND B) always gives the same result as NOT A OR NOT B. This rule, called De Morgan's law, lets engineers simplify circuits.</a:t>
-            </a:r>
-            <a:endParaRPr lang="en-US" sz="1300" dirty="0"/>
-          </a:p>
-        </p:txBody>
-      </p:sp>
-      <p:sp>
-        <p:nvSpPr>
-          <p:cNvPr id="13" name="Shape 11"/>
+              <a:t>None</a:t>
+            </a:r>
+            <a:endParaRPr lang="en-US" sz="1700" dirty="0"/>
+          </a:p>
+        </p:txBody>
+      </p:sp>
+      <p:sp>
+        <p:nvSpPr>
+          <p:cNvPr id="17" name="Shape 15"/>
           <p:cNvSpPr/>
           <p:nvPr/>
         </p:nvSpPr>
         <p:spPr>
           <a:xfrm>
-            <a:off x="502920" y="3794760"/>
-            <a:ext cx="5394960" cy="1737360"/>
+            <a:off x="502920" y="3886200"/>
+            <a:ext cx="11155680" cy="731520"/>
           </a:xfrm>
           <a:prstGeom prst="roundRect">
             <a:avLst>
-              <a:gd name="adj" fmla="val 6316"/>
+              <a:gd name="adj" fmla="val 15000"/>
             </a:avLst>
           </a:prstGeom>
           <a:solidFill>
@@ -3594,7 +4445,7 @@
           </a:solidFill>
           <a:ln w="15875">
             <a:solidFill>
-              <a:srgbClr val="2D63FF"/>
+              <a:srgbClr val="D9DEE7"/>
             </a:solidFill>
             <a:prstDash val="solid"/>
           </a:ln>
@@ -3602,14 +4453,75 @@
       </p:sp>
       <p:sp>
         <p:nvSpPr>
-          <p:cNvPr id="14" name="Text 12"/>
-          <p:cNvSpPr txBox="1"/>
-          <p:nvPr/>
-        </p:nvSpPr>
-        <p:spPr>
-          <a:xfrm>
-            <a:off x="822960" y="3977640"/>
-            <a:ext cx="4754880" cy="365760"/>
+          <p:cNvPr id="18" name="Shape 16"/>
+          <p:cNvSpPr/>
+          <p:nvPr/>
+        </p:nvSpPr>
+        <p:spPr>
+          <a:xfrm>
+            <a:off x="777240" y="4032504"/>
+            <a:ext cx="438912" cy="438912"/>
+          </a:xfrm>
+          <a:prstGeom prst="roundRect">
+            <a:avLst>
+              <a:gd name="adj" fmla="val 20833"/>
+            </a:avLst>
+          </a:prstGeom>
+          <a:solidFill>
+            <a:srgbClr val="EEF2FB"/>
+          </a:solidFill>
+          <a:ln/>
+        </p:spPr>
+      </p:sp>
+      <p:sp>
+        <p:nvSpPr>
+          <p:cNvPr id="19" name="Text 17"/>
+          <p:cNvSpPr txBox="1"/>
+          <p:nvPr/>
+        </p:nvSpPr>
+        <p:spPr>
+          <a:xfrm>
+            <a:off x="777240" y="4032504"/>
+            <a:ext cx="438912" cy="438912"/>
+          </a:xfrm>
+          <a:prstGeom prst="rect">
+            <a:avLst/>
+          </a:prstGeom>
+          <a:noFill/>
+          <a:ln/>
+        </p:spPr>
+        <p:txBody>
+          <a:bodyPr wrap="square" lIns="0" tIns="0" rIns="0" bIns="0" rtlCol="0" anchor="ctr"/>
+          <a:lstStyle/>
+          <a:p>
+            <a:pPr algn="ctr" indent="0" marL="0">
+              <a:buNone/>
+            </a:pPr>
+            <a:r>
+              <a:rPr lang="en-US" sz="1300" b="1" dirty="0">
+                <a:solidFill>
+                  <a:srgbClr val="2D63FF"/>
+                </a:solidFill>
+                <a:latin typeface="IBM Plex Mono" pitchFamily="34" charset="0"/>
+                <a:ea typeface="IBM Plex Mono" pitchFamily="34" charset="-122"/>
+                <a:cs typeface="IBM Plex Mono" pitchFamily="34" charset="-120"/>
+              </a:rPr>
+              <a:t>C</a:t>
+            </a:r>
+            <a:endParaRPr lang="en-US" sz="1300" dirty="0"/>
+          </a:p>
+        </p:txBody>
+      </p:sp>
+      <p:sp>
+        <p:nvSpPr>
+          <p:cNvPr id="20" name="Text 18"/>
+          <p:cNvSpPr txBox="1"/>
+          <p:nvPr/>
+        </p:nvSpPr>
+        <p:spPr>
+          <a:xfrm>
+            <a:off x="1417320" y="3886200"/>
+            <a:ext cx="10058400" cy="731520"/>
           </a:xfrm>
           <a:prstGeom prst="rect">
             <a:avLst/>
@@ -3622,79 +4534,40 @@
           <a:lstStyle/>
           <a:p>
             <a:pPr indent="0" marL="0">
-              <a:buNone/>
-            </a:pPr>
-            <a:r>
-              <a:rPr lang="en-US" sz="1600" b="1" dirty="0">
-                <a:solidFill>
-                  <a:srgbClr val="2D63FF"/>
+              <a:lnSpc>
+                <a:spcPct val="115000"/>
+              </a:lnSpc>
+              <a:buNone/>
+            </a:pPr>
+            <a:r>
+              <a:rPr lang="en-US" sz="1700" dirty="0">
+                <a:solidFill>
+                  <a:srgbClr val="101828"/>
                 </a:solidFill>
                 <a:latin typeface="IBM Plex Sans" pitchFamily="34" charset="0"/>
                 <a:ea typeface="IBM Plex Sans" pitchFamily="34" charset="-122"/>
                 <a:cs typeface="IBM Plex Sans" pitchFamily="34" charset="-120"/>
               </a:rPr>
-              <a:t>Light switches</a:t>
-            </a:r>
-            <a:endParaRPr lang="en-US" sz="1600" dirty="0"/>
-          </a:p>
-        </p:txBody>
-      </p:sp>
-      <p:sp>
-        <p:nvSpPr>
-          <p:cNvPr id="15" name="Text 13"/>
-          <p:cNvSpPr txBox="1"/>
-          <p:nvPr/>
-        </p:nvSpPr>
-        <p:spPr>
-          <a:xfrm>
-            <a:off x="822960" y="4361688"/>
-            <a:ext cx="4754880" cy="1005840"/>
-          </a:xfrm>
-          <a:prstGeom prst="rect">
-            <a:avLst/>
-          </a:prstGeom>
-          <a:noFill/>
-          <a:ln/>
-        </p:spPr>
-        <p:txBody>
-          <a:bodyPr wrap="square" lIns="0" tIns="0" rIns="0" bIns="0" rtlCol="0" anchor="t"/>
-          <a:lstStyle/>
-          <a:p>
-            <a:pPr indent="0" marL="0">
-              <a:lnSpc>
-                <a:spcPct val="120000"/>
-              </a:lnSpc>
-              <a:buNone/>
-            </a:pPr>
-            <a:r>
-              <a:rPr lang="en-US" sz="1300" dirty="0">
-                <a:solidFill>
-                  <a:srgbClr val="667085"/>
-                </a:solidFill>
-                <a:latin typeface="IBM Plex Sans" pitchFamily="34" charset="0"/>
-                <a:ea typeface="IBM Plex Sans" pitchFamily="34" charset="-122"/>
-                <a:cs typeface="IBM Plex Sans" pitchFamily="34" charset="-120"/>
-              </a:rPr>
-              <a:t>The two-way light switches at the top and bottom of many staircases work like an XOR gate: flipping either switch changes the light.</a:t>
-            </a:r>
-            <a:endParaRPr lang="en-US" sz="1300" dirty="0"/>
-          </a:p>
-        </p:txBody>
-      </p:sp>
-      <p:sp>
-        <p:nvSpPr>
-          <p:cNvPr id="16" name="Shape 14"/>
+              <a:t>AND</a:t>
+            </a:r>
+            <a:endParaRPr lang="en-US" sz="1700" dirty="0"/>
+          </a:p>
+        </p:txBody>
+      </p:sp>
+      <p:sp>
+        <p:nvSpPr>
+          <p:cNvPr id="21" name="Shape 19"/>
           <p:cNvSpPr/>
           <p:nvPr/>
         </p:nvSpPr>
         <p:spPr>
           <a:xfrm>
-            <a:off x="6217920" y="3794760"/>
-            <a:ext cx="5394960" cy="1737360"/>
+            <a:off x="502920" y="4754880"/>
+            <a:ext cx="11155680" cy="731520"/>
           </a:xfrm>
           <a:prstGeom prst="roundRect">
             <a:avLst>
-              <a:gd name="adj" fmla="val 6316"/>
+              <a:gd name="adj" fmla="val 15000"/>
             </a:avLst>
           </a:prstGeom>
           <a:solidFill>
@@ -3702,7 +4575,7 @@
           </a:solidFill>
           <a:ln w="15875">
             <a:solidFill>
-              <a:srgbClr val="08A6A6"/>
+              <a:srgbClr val="D9DEE7"/>
             </a:solidFill>
             <a:prstDash val="solid"/>
           </a:ln>
@@ -3710,14 +4583,75 @@
       </p:sp>
       <p:sp>
         <p:nvSpPr>
-          <p:cNvPr id="17" name="Text 15"/>
-          <p:cNvSpPr txBox="1"/>
-          <p:nvPr/>
-        </p:nvSpPr>
-        <p:spPr>
-          <a:xfrm>
-            <a:off x="6537960" y="3977640"/>
-            <a:ext cx="4754880" cy="365760"/>
+          <p:cNvPr id="22" name="Shape 20"/>
+          <p:cNvSpPr/>
+          <p:nvPr/>
+        </p:nvSpPr>
+        <p:spPr>
+          <a:xfrm>
+            <a:off x="777240" y="4901184"/>
+            <a:ext cx="438912" cy="438912"/>
+          </a:xfrm>
+          <a:prstGeom prst="roundRect">
+            <a:avLst>
+              <a:gd name="adj" fmla="val 20833"/>
+            </a:avLst>
+          </a:prstGeom>
+          <a:solidFill>
+            <a:srgbClr val="EEF2FB"/>
+          </a:solidFill>
+          <a:ln/>
+        </p:spPr>
+      </p:sp>
+      <p:sp>
+        <p:nvSpPr>
+          <p:cNvPr id="23" name="Text 21"/>
+          <p:cNvSpPr txBox="1"/>
+          <p:nvPr/>
+        </p:nvSpPr>
+        <p:spPr>
+          <a:xfrm>
+            <a:off x="777240" y="4901184"/>
+            <a:ext cx="438912" cy="438912"/>
+          </a:xfrm>
+          <a:prstGeom prst="rect">
+            <a:avLst/>
+          </a:prstGeom>
+          <a:noFill/>
+          <a:ln/>
+        </p:spPr>
+        <p:txBody>
+          <a:bodyPr wrap="square" lIns="0" tIns="0" rIns="0" bIns="0" rtlCol="0" anchor="ctr"/>
+          <a:lstStyle/>
+          <a:p>
+            <a:pPr algn="ctr" indent="0" marL="0">
+              <a:buNone/>
+            </a:pPr>
+            <a:r>
+              <a:rPr lang="en-US" sz="1300" b="1" dirty="0">
+                <a:solidFill>
+                  <a:srgbClr val="2D63FF"/>
+                </a:solidFill>
+                <a:latin typeface="IBM Plex Mono" pitchFamily="34" charset="0"/>
+                <a:ea typeface="IBM Plex Mono" pitchFamily="34" charset="-122"/>
+                <a:cs typeface="IBM Plex Mono" pitchFamily="34" charset="-120"/>
+              </a:rPr>
+              <a:t>D</a:t>
+            </a:r>
+            <a:endParaRPr lang="en-US" sz="1300" dirty="0"/>
+          </a:p>
+        </p:txBody>
+      </p:sp>
+      <p:sp>
+        <p:nvSpPr>
+          <p:cNvPr id="24" name="Text 22"/>
+          <p:cNvSpPr txBox="1"/>
+          <p:nvPr/>
+        </p:nvSpPr>
+        <p:spPr>
+          <a:xfrm>
+            <a:off x="1417320" y="4754880"/>
+            <a:ext cx="10058400" cy="731520"/>
           </a:xfrm>
           <a:prstGeom prst="rect">
             <a:avLst/>
@@ -3730,62 +4664,23 @@
           <a:lstStyle/>
           <a:p>
             <a:pPr indent="0" marL="0">
-              <a:buNone/>
-            </a:pPr>
-            <a:r>
-              <a:rPr lang="en-US" sz="1600" b="1" dirty="0">
-                <a:solidFill>
-                  <a:srgbClr val="08A6A6"/>
+              <a:lnSpc>
+                <a:spcPct val="115000"/>
+              </a:lnSpc>
+              <a:buNone/>
+            </a:pPr>
+            <a:r>
+              <a:rPr lang="en-US" sz="1700" dirty="0">
+                <a:solidFill>
+                  <a:srgbClr val="101828"/>
                 </a:solidFill>
                 <a:latin typeface="IBM Plex Sans" pitchFamily="34" charset="0"/>
                 <a:ea typeface="IBM Plex Sans" pitchFamily="34" charset="-122"/>
                 <a:cs typeface="IBM Plex Sans" pitchFamily="34" charset="-120"/>
               </a:rPr>
-              <a:t>Truth tables everywhere</a:t>
-            </a:r>
-            <a:endParaRPr lang="en-US" sz="1600" dirty="0"/>
-          </a:p>
-        </p:txBody>
-      </p:sp>
-      <p:sp>
-        <p:nvSpPr>
-          <p:cNvPr id="18" name="Text 16"/>
-          <p:cNvSpPr txBox="1"/>
-          <p:nvPr/>
-        </p:nvSpPr>
-        <p:spPr>
-          <a:xfrm>
-            <a:off x="6537960" y="4361688"/>
-            <a:ext cx="4754880" cy="1005840"/>
-          </a:xfrm>
-          <a:prstGeom prst="rect">
-            <a:avLst/>
-          </a:prstGeom>
-          <a:noFill/>
-          <a:ln/>
-        </p:spPr>
-        <p:txBody>
-          <a:bodyPr wrap="square" lIns="0" tIns="0" rIns="0" bIns="0" rtlCol="0" anchor="t"/>
-          <a:lstStyle/>
-          <a:p>
-            <a:pPr indent="0" marL="0">
-              <a:lnSpc>
-                <a:spcPct val="120000"/>
-              </a:lnSpc>
-              <a:buNone/>
-            </a:pPr>
-            <a:r>
-              <a:rPr lang="en-US" sz="1300" dirty="0">
-                <a:solidFill>
-                  <a:srgbClr val="667085"/>
-                </a:solidFill>
-                <a:latin typeface="IBM Plex Sans" pitchFamily="34" charset="0"/>
-                <a:ea typeface="IBM Plex Sans" pitchFamily="34" charset="-122"/>
-                <a:cs typeface="IBM Plex Sans" pitchFamily="34" charset="-120"/>
-              </a:rPr>
-              <a:t>Engineers use truth tables to test that circuits do exactly what they should, before building them.</a:t>
-            </a:r>
-            <a:endParaRPr lang="en-US" sz="1300" dirty="0"/>
+              <a:t>OR</a:t>
+            </a:r>
+            <a:endParaRPr lang="en-US" sz="1700" dirty="0"/>
           </a:p>
         </p:txBody>
       </p:sp>
@@ -3921,14 +4816,75 @@
       </p:sp>
       <p:sp>
         <p:nvSpPr>
-          <p:cNvPr id="5" name="Text 3"/>
-          <p:cNvSpPr txBox="1"/>
-          <p:nvPr/>
-        </p:nvSpPr>
-        <p:spPr>
-          <a:xfrm>
-            <a:off x="502920" y="411480"/>
-            <a:ext cx="11155680" cy="777240"/>
+          <p:cNvPr id="5" name="Shape 3"/>
+          <p:cNvSpPr/>
+          <p:nvPr/>
+        </p:nvSpPr>
+        <p:spPr>
+          <a:xfrm>
+            <a:off x="502920" y="438912"/>
+            <a:ext cx="3108960" cy="502920"/>
+          </a:xfrm>
+          <a:prstGeom prst="roundRect">
+            <a:avLst>
+              <a:gd name="adj" fmla="val 18182"/>
+            </a:avLst>
+          </a:prstGeom>
+          <a:solidFill>
+            <a:srgbClr val="F4B942"/>
+          </a:solidFill>
+          <a:ln/>
+        </p:spPr>
+      </p:sp>
+      <p:sp>
+        <p:nvSpPr>
+          <p:cNvPr id="6" name="Text 4"/>
+          <p:cNvSpPr txBox="1"/>
+          <p:nvPr/>
+        </p:nvSpPr>
+        <p:spPr>
+          <a:xfrm>
+            <a:off x="502920" y="438912"/>
+            <a:ext cx="3108960" cy="502920"/>
+          </a:xfrm>
+          <a:prstGeom prst="rect">
+            <a:avLst/>
+          </a:prstGeom>
+          <a:noFill/>
+          <a:ln/>
+        </p:spPr>
+        <p:txBody>
+          <a:bodyPr wrap="square" lIns="0" tIns="0" rIns="0" bIns="0" rtlCol="0" anchor="ctr"/>
+          <a:lstStyle/>
+          <a:p>
+            <a:pPr algn="ctr" indent="0" marL="0">
+              <a:buNone/>
+            </a:pPr>
+            <a:r>
+              <a:rPr lang="en-US" sz="1300" b="1" dirty="0">
+                <a:solidFill>
+                  <a:srgbClr val="101828"/>
+                </a:solidFill>
+                <a:latin typeface="IBM Plex Mono" pitchFamily="34" charset="0"/>
+                <a:ea typeface="IBM Plex Mono" pitchFamily="34" charset="-122"/>
+                <a:cs typeface="IBM Plex Mono" pitchFamily="34" charset="-120"/>
+              </a:rPr>
+              <a:t>★  FINAL CHALLENGE</a:t>
+            </a:r>
+            <a:endParaRPr lang="en-US" sz="1300" dirty="0"/>
+          </a:p>
+        </p:txBody>
+      </p:sp>
+      <p:sp>
+        <p:nvSpPr>
+          <p:cNvPr id="7" name="Text 5"/>
+          <p:cNvSpPr txBox="1"/>
+          <p:nvPr/>
+        </p:nvSpPr>
+        <p:spPr>
+          <a:xfrm>
+            <a:off x="502920" y="1097280"/>
+            <a:ext cx="11155680" cy="731520"/>
           </a:xfrm>
           <a:prstGeom prst="rect">
             <a:avLst/>
@@ -3944,7 +4900,7 @@
               <a:buNone/>
             </a:pPr>
             <a:r>
-              <a:rPr lang="en-US" sz="3200" b="1" dirty="0">
+              <a:rPr lang="en-US" sz="3400" b="1" dirty="0">
                 <a:solidFill>
                   <a:srgbClr val="101828"/>
                 </a:solidFill>
@@ -3952,65 +4908,26 @@
                 <a:ea typeface="IBM Plex Sans" pitchFamily="34" charset="-122"/>
                 <a:cs typeface="IBM Plex Sans" pitchFamily="34" charset="-120"/>
               </a:rPr>
-              <a:t>Exam practice</a:t>
-            </a:r>
-            <a:endParaRPr lang="en-US" sz="3200" dirty="0"/>
-          </a:p>
-        </p:txBody>
-      </p:sp>
-      <p:sp>
-        <p:nvSpPr>
-          <p:cNvPr id="6" name="Text 4"/>
-          <p:cNvSpPr txBox="1"/>
-          <p:nvPr/>
-        </p:nvSpPr>
-        <p:spPr>
-          <a:xfrm>
-            <a:off x="502920" y="1170432"/>
-            <a:ext cx="11155680" cy="411480"/>
-          </a:xfrm>
-          <a:prstGeom prst="rect">
-            <a:avLst/>
-          </a:prstGeom>
-          <a:noFill/>
-          <a:ln/>
-        </p:spPr>
-        <p:txBody>
-          <a:bodyPr wrap="square" lIns="0" tIns="0" rIns="0" bIns="0" rtlCol="0" anchor="ctr"/>
-          <a:lstStyle/>
-          <a:p>
-            <a:pPr indent="0" marL="0">
-              <a:buNone/>
-            </a:pPr>
-            <a:r>
-              <a:rPr lang="en-US" sz="1500" dirty="0">
-                <a:solidFill>
-                  <a:srgbClr val="667085"/>
-                </a:solidFill>
-                <a:latin typeface="IBM Plex Sans" pitchFamily="34" charset="0"/>
-                <a:ea typeface="IBM Plex Sans" pitchFamily="34" charset="-122"/>
-                <a:cs typeface="IBM Plex Sans" pitchFamily="34" charset="-120"/>
-              </a:rPr>
-              <a:t>Devices away. Answer from memory on the worksheet.</a:t>
-            </a:r>
-            <a:endParaRPr lang="en-US" sz="1500" dirty="0"/>
-          </a:p>
-        </p:txBody>
-      </p:sp>
-      <p:sp>
-        <p:nvSpPr>
-          <p:cNvPr id="7" name="Shape 5"/>
+              <a:t>Detective's table</a:t>
+            </a:r>
+            <a:endParaRPr lang="en-US" sz="3400" dirty="0"/>
+          </a:p>
+        </p:txBody>
+      </p:sp>
+      <p:sp>
+        <p:nvSpPr>
+          <p:cNvPr id="8" name="Shape 6"/>
           <p:cNvSpPr/>
           <p:nvPr/>
         </p:nvSpPr>
         <p:spPr>
           <a:xfrm>
-            <a:off x="502920" y="1828800"/>
-            <a:ext cx="11155680" cy="1097280"/>
+            <a:off x="502920" y="2011680"/>
+            <a:ext cx="11155680" cy="2194560"/>
           </a:xfrm>
           <a:prstGeom prst="roundRect">
             <a:avLst>
-              <a:gd name="adj" fmla="val 10000"/>
+              <a:gd name="adj" fmla="val 5000"/>
             </a:avLst>
           </a:prstGeom>
           <a:solidFill>
@@ -4018,7 +4935,7 @@
           </a:solidFill>
           <a:ln w="15875">
             <a:solidFill>
-              <a:srgbClr val="D9DEE7"/>
+              <a:srgbClr val="2D63FF"/>
             </a:solidFill>
             <a:prstDash val="solid"/>
           </a:ln>
@@ -4026,14 +4943,14 @@
       </p:sp>
       <p:sp>
         <p:nvSpPr>
-          <p:cNvPr id="8" name="Text 6"/>
-          <p:cNvSpPr txBox="1"/>
-          <p:nvPr/>
-        </p:nvSpPr>
-        <p:spPr>
-          <a:xfrm>
-            <a:off x="914400" y="1938528"/>
-            <a:ext cx="9418320" cy="877824"/>
+          <p:cNvPr id="9" name="Text 7"/>
+          <p:cNvSpPr txBox="1"/>
+          <p:nvPr/>
+        </p:nvSpPr>
+        <p:spPr>
+          <a:xfrm>
+            <a:off x="1005840" y="2331720"/>
+            <a:ext cx="10149840" cy="1554480"/>
           </a:xfrm>
           <a:prstGeom prst="rect">
             <a:avLst/>
@@ -4047,12 +4964,12 @@
           <a:p>
             <a:pPr indent="0" marL="0">
               <a:lnSpc>
-                <a:spcPct val="118000"/>
+                <a:spcPct val="130000"/>
               </a:lnSpc>
               <a:buNone/>
             </a:pPr>
             <a:r>
-              <a:rPr lang="en-US" sz="1700" dirty="0">
+              <a:rPr lang="en-US" sz="2200" dirty="0">
                 <a:solidFill>
                   <a:srgbClr val="101828"/>
                 </a:solidFill>
@@ -4060,33 +4977,11 @@
                 <a:ea typeface="IBM Plex Sans" pitchFamily="34" charset="-122"/>
                 <a:cs typeface="IBM Plex Sans" pitchFamily="34" charset="-120"/>
               </a:rPr>
-              <a:t>State how many rows a truth table needs for four inputs.</a:t>
-            </a:r>
-            <a:endParaRPr lang="en-US" sz="1700" dirty="0"/>
-          </a:p>
-        </p:txBody>
-      </p:sp>
-      <p:sp>
-        <p:nvSpPr>
-          <p:cNvPr id="9" name="Shape 7"/>
-          <p:cNvSpPr/>
-          <p:nvPr/>
-        </p:nvSpPr>
-        <p:spPr>
-          <a:xfrm>
-            <a:off x="10515600" y="2130552"/>
-            <a:ext cx="868680" cy="493776"/>
-          </a:xfrm>
-          <a:prstGeom prst="roundRect">
-            <a:avLst>
-              <a:gd name="adj" fmla="val 18519"/>
-            </a:avLst>
-          </a:prstGeom>
-          <a:solidFill>
-            <a:srgbClr val="EEF2FB"/>
-          </a:solidFill>
-          <a:ln/>
-        </p:spPr>
+              <a:t>Complete the full truth table, using the intermediate columns to help you.</a:t>
+            </a:r>
+            <a:endParaRPr lang="en-US" sz="2200" dirty="0"/>
+          </a:p>
+        </p:txBody>
       </p:sp>
       <p:sp>
         <p:nvSpPr>
@@ -4096,74 +4991,8 @@
         </p:nvSpPr>
         <p:spPr>
           <a:xfrm>
-            <a:off x="10515600" y="2130552"/>
-            <a:ext cx="868680" cy="493776"/>
-          </a:xfrm>
-          <a:prstGeom prst="rect">
-            <a:avLst/>
-          </a:prstGeom>
-          <a:noFill/>
-          <a:ln/>
-        </p:spPr>
-        <p:txBody>
-          <a:bodyPr wrap="square" lIns="0" tIns="0" rIns="0" bIns="0" rtlCol="0" anchor="ctr"/>
-          <a:lstStyle/>
-          <a:p>
-            <a:pPr algn="ctr" indent="0" marL="0">
-              <a:buNone/>
-            </a:pPr>
-            <a:r>
-              <a:rPr lang="en-US" sz="1500" b="1" dirty="0">
-                <a:solidFill>
-                  <a:srgbClr val="2D63FF"/>
-                </a:solidFill>
-                <a:latin typeface="IBM Plex Mono" pitchFamily="34" charset="0"/>
-                <a:ea typeface="IBM Plex Mono" pitchFamily="34" charset="-122"/>
-                <a:cs typeface="IBM Plex Mono" pitchFamily="34" charset="-120"/>
-              </a:rPr>
-              <a:t>[1]</a:t>
-            </a:r>
-            <a:endParaRPr lang="en-US" sz="1500" dirty="0"/>
-          </a:p>
-        </p:txBody>
-      </p:sp>
-      <p:sp>
-        <p:nvSpPr>
-          <p:cNvPr id="11" name="Shape 9"/>
-          <p:cNvSpPr/>
-          <p:nvPr/>
-        </p:nvSpPr>
-        <p:spPr>
-          <a:xfrm>
-            <a:off x="502920" y="3127248"/>
-            <a:ext cx="11155680" cy="1097280"/>
-          </a:xfrm>
-          <a:prstGeom prst="roundRect">
-            <a:avLst>
-              <a:gd name="adj" fmla="val 10000"/>
-            </a:avLst>
-          </a:prstGeom>
-          <a:solidFill>
-            <a:srgbClr val="FFFFFF"/>
-          </a:solidFill>
-          <a:ln w="15875">
-            <a:solidFill>
-              <a:srgbClr val="D9DEE7"/>
-            </a:solidFill>
-            <a:prstDash val="solid"/>
-          </a:ln>
-        </p:spPr>
-      </p:sp>
-      <p:sp>
-        <p:nvSpPr>
-          <p:cNvPr id="12" name="Text 10"/>
-          <p:cNvSpPr txBox="1"/>
-          <p:nvPr/>
-        </p:nvSpPr>
-        <p:spPr>
-          <a:xfrm>
-            <a:off x="914400" y="3236976"/>
-            <a:ext cx="9418320" cy="877824"/>
+            <a:off x="502920" y="4526280"/>
+            <a:ext cx="11155680" cy="457200"/>
           </a:xfrm>
           <a:prstGeom prst="rect">
             <a:avLst/>
@@ -4176,84 +5005,20 @@
           <a:lstStyle/>
           <a:p>
             <a:pPr indent="0" marL="0">
-              <a:lnSpc>
-                <a:spcPct val="118000"/>
-              </a:lnSpc>
-              <a:buNone/>
-            </a:pPr>
-            <a:r>
-              <a:rPr lang="en-US" sz="1700" dirty="0">
-                <a:solidFill>
-                  <a:srgbClr val="101828"/>
+              <a:buNone/>
+            </a:pPr>
+            <a:r>
+              <a:rPr lang="en-US" sz="1600" dirty="0">
+                <a:solidFill>
+                  <a:srgbClr val="667085"/>
                 </a:solidFill>
                 <a:latin typeface="IBM Plex Sans" pitchFamily="34" charset="0"/>
                 <a:ea typeface="IBM Plex Sans" pitchFamily="34" charset="-122"/>
                 <a:cs typeface="IBM Plex Sans" pitchFamily="34" charset="-120"/>
               </a:rPr>
-              <a:t>Complete a truth table for Q = NOT P OR (Q AND R) on the back of this sheet.</a:t>
-            </a:r>
-            <a:endParaRPr lang="en-US" sz="1700" dirty="0"/>
-          </a:p>
-        </p:txBody>
-      </p:sp>
-      <p:sp>
-        <p:nvSpPr>
-          <p:cNvPr id="13" name="Shape 11"/>
-          <p:cNvSpPr/>
-          <p:nvPr/>
-        </p:nvSpPr>
-        <p:spPr>
-          <a:xfrm>
-            <a:off x="10515600" y="3429000"/>
-            <a:ext cx="868680" cy="493776"/>
-          </a:xfrm>
-          <a:prstGeom prst="roundRect">
-            <a:avLst>
-              <a:gd name="adj" fmla="val 18519"/>
-            </a:avLst>
-          </a:prstGeom>
-          <a:solidFill>
-            <a:srgbClr val="EEF2FB"/>
-          </a:solidFill>
-          <a:ln/>
-        </p:spPr>
-      </p:sp>
-      <p:sp>
-        <p:nvSpPr>
-          <p:cNvPr id="14" name="Text 12"/>
-          <p:cNvSpPr txBox="1"/>
-          <p:nvPr/>
-        </p:nvSpPr>
-        <p:spPr>
-          <a:xfrm>
-            <a:off x="10515600" y="3429000"/>
-            <a:ext cx="868680" cy="493776"/>
-          </a:xfrm>
-          <a:prstGeom prst="rect">
-            <a:avLst/>
-          </a:prstGeom>
-          <a:noFill/>
-          <a:ln/>
-        </p:spPr>
-        <p:txBody>
-          <a:bodyPr wrap="square" lIns="0" tIns="0" rIns="0" bIns="0" rtlCol="0" anchor="ctr"/>
-          <a:lstStyle/>
-          <a:p>
-            <a:pPr algn="ctr" indent="0" marL="0">
-              <a:buNone/>
-            </a:pPr>
-            <a:r>
-              <a:rPr lang="en-US" sz="1500" b="1" dirty="0">
-                <a:solidFill>
-                  <a:srgbClr val="2D63FF"/>
-                </a:solidFill>
-                <a:latin typeface="IBM Plex Mono" pitchFamily="34" charset="0"/>
-                <a:ea typeface="IBM Plex Mono" pitchFamily="34" charset="-122"/>
-                <a:cs typeface="IBM Plex Mono" pitchFamily="34" charset="-120"/>
-              </a:rPr>
-              <a:t>[8]</a:t>
-            </a:r>
-            <a:endParaRPr lang="en-US" sz="1500" dirty="0"/>
+              <a:t>Predict on paper first, then look down and test it.</a:t>
+            </a:r>
+            <a:endParaRPr lang="en-US" sz="1600" dirty="0"/>
           </a:p>
         </p:txBody>
       </p:sp>
@@ -4268,6 +5033,1114 @@
 <file path=ppt/slides/slide14.xml><?xml version="1.0" encoding="utf-8"?>
 <p:sld xmlns:a="http://schemas.openxmlformats.org/drawingml/2006/main" xmlns:r="http://schemas.openxmlformats.org/officeDocument/2006/relationships" xmlns:p="http://schemas.openxmlformats.org/presentationml/2006/main">
   <p:cSld name="Slide 14">
+    <p:bg>
+      <p:bgPr>
+        <a:solidFill>
+          <a:srgbClr val="F7F7F4"/>
+        </a:solidFill>
+      </p:bgPr>
+    </p:bg>
+    <p:spTree>
+      <p:nvGrpSpPr>
+        <p:cNvPr id="1" name=""/>
+        <p:cNvGrpSpPr/>
+        <p:nvPr/>
+      </p:nvGrpSpPr>
+      <p:grpSpPr>
+        <a:xfrm>
+          <a:off x="0" y="0"/>
+          <a:ext cx="0" cy="0"/>
+          <a:chOff x="0" y="0"/>
+          <a:chExt cx="0" cy="0"/>
+        </a:xfrm>
+      </p:grpSpPr>
+      <p:sp>
+        <p:nvSpPr>
+          <p:cNvPr id="2" name="Shape 0"/>
+          <p:cNvSpPr/>
+          <p:nvPr/>
+        </p:nvSpPr>
+        <p:spPr>
+          <a:xfrm>
+            <a:off x="0" y="0"/>
+            <a:ext cx="12188952" cy="82296"/>
+          </a:xfrm>
+          <a:prstGeom prst="rect">
+            <a:avLst/>
+          </a:prstGeom>
+          <a:solidFill>
+            <a:srgbClr val="2D63FF"/>
+          </a:solidFill>
+          <a:ln/>
+        </p:spPr>
+      </p:sp>
+      <p:sp>
+        <p:nvSpPr>
+          <p:cNvPr id="3" name="Text 1"/>
+          <p:cNvSpPr txBox="1"/>
+          <p:nvPr/>
+        </p:nvSpPr>
+        <p:spPr>
+          <a:xfrm>
+            <a:off x="502920" y="6236208"/>
+            <a:ext cx="7772400" cy="365760"/>
+          </a:xfrm>
+          <a:prstGeom prst="rect">
+            <a:avLst/>
+          </a:prstGeom>
+          <a:noFill/>
+          <a:ln/>
+        </p:spPr>
+        <p:txBody>
+          <a:bodyPr wrap="square" lIns="0" tIns="0" rIns="0" bIns="0" rtlCol="0" anchor="ctr"/>
+          <a:lstStyle/>
+          <a:p>
+            <a:pPr indent="0" marL="0">
+              <a:buNone/>
+            </a:pPr>
+            <a:r>
+              <a:rPr lang="en-US" sz="1100" dirty="0">
+                <a:solidFill>
+                  <a:srgbClr val="667085"/>
+                </a:solidFill>
+                <a:latin typeface="IBM Plex Mono" pitchFamily="34" charset="0"/>
+                <a:ea typeface="IBM Plex Mono" pitchFamily="34" charset="-122"/>
+                <a:cs typeface="IBM Plex Mono" pitchFamily="34" charset="-120"/>
+              </a:rPr>
+              <a:t>2.4 Boolean logic  |  Lesson 2</a:t>
+            </a:r>
+            <a:endParaRPr lang="en-US" sz="1100" dirty="0"/>
+          </a:p>
+        </p:txBody>
+      </p:sp>
+      <p:sp>
+        <p:nvSpPr>
+          <p:cNvPr id="4" name="Text 2"/>
+          <p:cNvSpPr txBox="1"/>
+          <p:nvPr/>
+        </p:nvSpPr>
+        <p:spPr>
+          <a:xfrm>
+            <a:off x="9326880" y="6236208"/>
+            <a:ext cx="2377440" cy="365760"/>
+          </a:xfrm>
+          <a:prstGeom prst="rect">
+            <a:avLst/>
+          </a:prstGeom>
+          <a:noFill/>
+          <a:ln/>
+        </p:spPr>
+        <p:txBody>
+          <a:bodyPr wrap="square" lIns="0" tIns="0" rIns="0" bIns="0" rtlCol="0" anchor="ctr"/>
+          <a:lstStyle/>
+          <a:p>
+            <a:pPr algn="r" indent="0" marL="0">
+              <a:buNone/>
+            </a:pPr>
+            <a:r>
+              <a:rPr lang="en-US" sz="1100" dirty="0">
+                <a:solidFill>
+                  <a:srgbClr val="667085"/>
+                </a:solidFill>
+                <a:latin typeface="IBM Plex Mono" pitchFamily="34" charset="0"/>
+                <a:ea typeface="IBM Plex Mono" pitchFamily="34" charset="-122"/>
+                <a:cs typeface="IBM Plex Mono" pitchFamily="34" charset="-120"/>
+              </a:rPr>
+              <a:t>Revise 360</a:t>
+            </a:r>
+            <a:endParaRPr lang="en-US" sz="1100" dirty="0"/>
+          </a:p>
+        </p:txBody>
+      </p:sp>
+      <p:sp>
+        <p:nvSpPr>
+          <p:cNvPr id="5" name="Text 3"/>
+          <p:cNvSpPr txBox="1"/>
+          <p:nvPr/>
+        </p:nvSpPr>
+        <p:spPr>
+          <a:xfrm>
+            <a:off x="502920" y="411480"/>
+            <a:ext cx="11155680" cy="777240"/>
+          </a:xfrm>
+          <a:prstGeom prst="rect">
+            <a:avLst/>
+          </a:prstGeom>
+          <a:noFill/>
+          <a:ln/>
+        </p:spPr>
+        <p:txBody>
+          <a:bodyPr wrap="square" lIns="0" tIns="0" rIns="0" bIns="0" rtlCol="0" anchor="ctr"/>
+          <a:lstStyle/>
+          <a:p>
+            <a:pPr indent="0" marL="0">
+              <a:buNone/>
+            </a:pPr>
+            <a:r>
+              <a:rPr lang="en-US" sz="3200" b="1" dirty="0">
+                <a:solidFill>
+                  <a:srgbClr val="101828"/>
+                </a:solidFill>
+                <a:latin typeface="IBM Plex Sans" pitchFamily="34" charset="0"/>
+                <a:ea typeface="IBM Plex Sans" pitchFamily="34" charset="-122"/>
+                <a:cs typeface="IBM Plex Sans" pitchFamily="34" charset="-120"/>
+              </a:rPr>
+              <a:t>Worth knowing</a:t>
+            </a:r>
+            <a:endParaRPr lang="en-US" sz="3200" dirty="0"/>
+          </a:p>
+        </p:txBody>
+      </p:sp>
+      <p:sp>
+        <p:nvSpPr>
+          <p:cNvPr id="6" name="Text 4"/>
+          <p:cNvSpPr txBox="1"/>
+          <p:nvPr/>
+        </p:nvSpPr>
+        <p:spPr>
+          <a:xfrm>
+            <a:off x="502920" y="1170432"/>
+            <a:ext cx="11155680" cy="411480"/>
+          </a:xfrm>
+          <a:prstGeom prst="rect">
+            <a:avLst/>
+          </a:prstGeom>
+          <a:noFill/>
+          <a:ln/>
+        </p:spPr>
+        <p:txBody>
+          <a:bodyPr wrap="square" lIns="0" tIns="0" rIns="0" bIns="0" rtlCol="0" anchor="ctr"/>
+          <a:lstStyle/>
+          <a:p>
+            <a:pPr indent="0" marL="0">
+              <a:buNone/>
+            </a:pPr>
+            <a:r>
+              <a:rPr lang="en-US" sz="1500" dirty="0">
+                <a:solidFill>
+                  <a:srgbClr val="667085"/>
+                </a:solidFill>
+                <a:latin typeface="IBM Plex Sans" pitchFamily="34" charset="0"/>
+                <a:ea typeface="IBM Plex Sans" pitchFamily="34" charset="-122"/>
+                <a:cs typeface="IBM Plex Sans" pitchFamily="34" charset="-120"/>
+              </a:rPr>
+              <a:t>The information markers dotted around the room</a:t>
+            </a:r>
+            <a:endParaRPr lang="en-US" sz="1500" dirty="0"/>
+          </a:p>
+        </p:txBody>
+      </p:sp>
+      <p:sp>
+        <p:nvSpPr>
+          <p:cNvPr id="7" name="Shape 5"/>
+          <p:cNvSpPr/>
+          <p:nvPr/>
+        </p:nvSpPr>
+        <p:spPr>
+          <a:xfrm>
+            <a:off x="502920" y="1828800"/>
+            <a:ext cx="5394960" cy="1737360"/>
+          </a:xfrm>
+          <a:prstGeom prst="roundRect">
+            <a:avLst>
+              <a:gd name="adj" fmla="val 6316"/>
+            </a:avLst>
+          </a:prstGeom>
+          <a:solidFill>
+            <a:srgbClr val="FFFFFF"/>
+          </a:solidFill>
+          <a:ln w="15875">
+            <a:solidFill>
+              <a:srgbClr val="2D63FF"/>
+            </a:solidFill>
+            <a:prstDash val="solid"/>
+          </a:ln>
+        </p:spPr>
+      </p:sp>
+      <p:sp>
+        <p:nvSpPr>
+          <p:cNvPr id="8" name="Text 6"/>
+          <p:cNvSpPr txBox="1"/>
+          <p:nvPr/>
+        </p:nvSpPr>
+        <p:spPr>
+          <a:xfrm>
+            <a:off x="822960" y="2011680"/>
+            <a:ext cx="4754880" cy="365760"/>
+          </a:xfrm>
+          <a:prstGeom prst="rect">
+            <a:avLst/>
+          </a:prstGeom>
+          <a:noFill/>
+          <a:ln/>
+        </p:spPr>
+        <p:txBody>
+          <a:bodyPr wrap="square" lIns="0" tIns="0" rIns="0" bIns="0" rtlCol="0" anchor="ctr"/>
+          <a:lstStyle/>
+          <a:p>
+            <a:pPr indent="0" marL="0">
+              <a:buNone/>
+            </a:pPr>
+            <a:r>
+              <a:rPr lang="en-US" sz="1600" b="1" dirty="0">
+                <a:solidFill>
+                  <a:srgbClr val="2D63FF"/>
+                </a:solidFill>
+                <a:latin typeface="IBM Plex Sans" pitchFamily="34" charset="0"/>
+                <a:ea typeface="IBM Plex Sans" pitchFamily="34" charset="-122"/>
+                <a:cs typeface="IBM Plex Sans" pitchFamily="34" charset="-120"/>
+              </a:rPr>
+              <a:t>Binary counting</a:t>
+            </a:r>
+            <a:endParaRPr lang="en-US" sz="1600" dirty="0"/>
+          </a:p>
+        </p:txBody>
+      </p:sp>
+      <p:sp>
+        <p:nvSpPr>
+          <p:cNvPr id="9" name="Text 7"/>
+          <p:cNvSpPr txBox="1"/>
+          <p:nvPr/>
+        </p:nvSpPr>
+        <p:spPr>
+          <a:xfrm>
+            <a:off x="822960" y="2395728"/>
+            <a:ext cx="4754880" cy="1005840"/>
+          </a:xfrm>
+          <a:prstGeom prst="rect">
+            <a:avLst/>
+          </a:prstGeom>
+          <a:noFill/>
+          <a:ln/>
+        </p:spPr>
+        <p:txBody>
+          <a:bodyPr wrap="square" lIns="0" tIns="0" rIns="0" bIns="0" rtlCol="0" anchor="t"/>
+          <a:lstStyle/>
+          <a:p>
+            <a:pPr indent="0" marL="0">
+              <a:lnSpc>
+                <a:spcPct val="120000"/>
+              </a:lnSpc>
+              <a:buNone/>
+            </a:pPr>
+            <a:r>
+              <a:rPr lang="en-US" sz="1300" dirty="0">
+                <a:solidFill>
+                  <a:srgbClr val="667085"/>
+                </a:solidFill>
+                <a:latin typeface="IBM Plex Sans" pitchFamily="34" charset="0"/>
+                <a:ea typeface="IBM Plex Sans" pitchFamily="34" charset="-122"/>
+                <a:cs typeface="IBM Plex Sans" pitchFamily="34" charset="-120"/>
+              </a:rPr>
+              <a:t>The input columns of a truth table are just binary numbers counting up: 000, 001, 010 and so on. That's why there are 2ⁿ rows.</a:t>
+            </a:r>
+            <a:endParaRPr lang="en-US" sz="1300" dirty="0"/>
+          </a:p>
+        </p:txBody>
+      </p:sp>
+      <p:sp>
+        <p:nvSpPr>
+          <p:cNvPr id="10" name="Shape 8"/>
+          <p:cNvSpPr/>
+          <p:nvPr/>
+        </p:nvSpPr>
+        <p:spPr>
+          <a:xfrm>
+            <a:off x="6217920" y="1828800"/>
+            <a:ext cx="5394960" cy="1737360"/>
+          </a:xfrm>
+          <a:prstGeom prst="roundRect">
+            <a:avLst>
+              <a:gd name="adj" fmla="val 6316"/>
+            </a:avLst>
+          </a:prstGeom>
+          <a:solidFill>
+            <a:srgbClr val="FFFFFF"/>
+          </a:solidFill>
+          <a:ln w="15875">
+            <a:solidFill>
+              <a:srgbClr val="08A6A6"/>
+            </a:solidFill>
+            <a:prstDash val="solid"/>
+          </a:ln>
+        </p:spPr>
+      </p:sp>
+      <p:sp>
+        <p:nvSpPr>
+          <p:cNvPr id="11" name="Text 9"/>
+          <p:cNvSpPr txBox="1"/>
+          <p:nvPr/>
+        </p:nvSpPr>
+        <p:spPr>
+          <a:xfrm>
+            <a:off x="6537960" y="2011680"/>
+            <a:ext cx="4754880" cy="365760"/>
+          </a:xfrm>
+          <a:prstGeom prst="rect">
+            <a:avLst/>
+          </a:prstGeom>
+          <a:noFill/>
+          <a:ln/>
+        </p:spPr>
+        <p:txBody>
+          <a:bodyPr wrap="square" lIns="0" tIns="0" rIns="0" bIns="0" rtlCol="0" anchor="ctr"/>
+          <a:lstStyle/>
+          <a:p>
+            <a:pPr indent="0" marL="0">
+              <a:buNone/>
+            </a:pPr>
+            <a:r>
+              <a:rPr lang="en-US" sz="1600" b="1" dirty="0">
+                <a:solidFill>
+                  <a:srgbClr val="08A6A6"/>
+                </a:solidFill>
+                <a:latin typeface="IBM Plex Sans" pitchFamily="34" charset="0"/>
+                <a:ea typeface="IBM Plex Sans" pitchFamily="34" charset="-122"/>
+                <a:cs typeface="IBM Plex Sans" pitchFamily="34" charset="-120"/>
+              </a:rPr>
+              <a:t>De Morgan's law</a:t>
+            </a:r>
+            <a:endParaRPr lang="en-US" sz="1600" dirty="0"/>
+          </a:p>
+        </p:txBody>
+      </p:sp>
+      <p:sp>
+        <p:nvSpPr>
+          <p:cNvPr id="12" name="Text 10"/>
+          <p:cNvSpPr txBox="1"/>
+          <p:nvPr/>
+        </p:nvSpPr>
+        <p:spPr>
+          <a:xfrm>
+            <a:off x="6537960" y="2395728"/>
+            <a:ext cx="4754880" cy="1005840"/>
+          </a:xfrm>
+          <a:prstGeom prst="rect">
+            <a:avLst/>
+          </a:prstGeom>
+          <a:noFill/>
+          <a:ln/>
+        </p:spPr>
+        <p:txBody>
+          <a:bodyPr wrap="square" lIns="0" tIns="0" rIns="0" bIns="0" rtlCol="0" anchor="t"/>
+          <a:lstStyle/>
+          <a:p>
+            <a:pPr indent="0" marL="0">
+              <a:lnSpc>
+                <a:spcPct val="120000"/>
+              </a:lnSpc>
+              <a:buNone/>
+            </a:pPr>
+            <a:r>
+              <a:rPr lang="en-US" sz="1300" dirty="0">
+                <a:solidFill>
+                  <a:srgbClr val="667085"/>
+                </a:solidFill>
+                <a:latin typeface="IBM Plex Sans" pitchFamily="34" charset="0"/>
+                <a:ea typeface="IBM Plex Sans" pitchFamily="34" charset="-122"/>
+                <a:cs typeface="IBM Plex Sans" pitchFamily="34" charset="-120"/>
+              </a:rPr>
+              <a:t>NOT (A AND B) always gives the same result as NOT A OR NOT B. This rule, called De Morgan's law, lets engineers simplify circuits.</a:t>
+            </a:r>
+            <a:endParaRPr lang="en-US" sz="1300" dirty="0"/>
+          </a:p>
+        </p:txBody>
+      </p:sp>
+      <p:sp>
+        <p:nvSpPr>
+          <p:cNvPr id="13" name="Shape 11"/>
+          <p:cNvSpPr/>
+          <p:nvPr/>
+        </p:nvSpPr>
+        <p:spPr>
+          <a:xfrm>
+            <a:off x="502920" y="3794760"/>
+            <a:ext cx="5394960" cy="1737360"/>
+          </a:xfrm>
+          <a:prstGeom prst="roundRect">
+            <a:avLst>
+              <a:gd name="adj" fmla="val 6316"/>
+            </a:avLst>
+          </a:prstGeom>
+          <a:solidFill>
+            <a:srgbClr val="FFFFFF"/>
+          </a:solidFill>
+          <a:ln w="15875">
+            <a:solidFill>
+              <a:srgbClr val="2D63FF"/>
+            </a:solidFill>
+            <a:prstDash val="solid"/>
+          </a:ln>
+        </p:spPr>
+      </p:sp>
+      <p:sp>
+        <p:nvSpPr>
+          <p:cNvPr id="14" name="Text 12"/>
+          <p:cNvSpPr txBox="1"/>
+          <p:nvPr/>
+        </p:nvSpPr>
+        <p:spPr>
+          <a:xfrm>
+            <a:off x="822960" y="3977640"/>
+            <a:ext cx="4754880" cy="365760"/>
+          </a:xfrm>
+          <a:prstGeom prst="rect">
+            <a:avLst/>
+          </a:prstGeom>
+          <a:noFill/>
+          <a:ln/>
+        </p:spPr>
+        <p:txBody>
+          <a:bodyPr wrap="square" lIns="0" tIns="0" rIns="0" bIns="0" rtlCol="0" anchor="ctr"/>
+          <a:lstStyle/>
+          <a:p>
+            <a:pPr indent="0" marL="0">
+              <a:buNone/>
+            </a:pPr>
+            <a:r>
+              <a:rPr lang="en-US" sz="1600" b="1" dirty="0">
+                <a:solidFill>
+                  <a:srgbClr val="2D63FF"/>
+                </a:solidFill>
+                <a:latin typeface="IBM Plex Sans" pitchFamily="34" charset="0"/>
+                <a:ea typeface="IBM Plex Sans" pitchFamily="34" charset="-122"/>
+                <a:cs typeface="IBM Plex Sans" pitchFamily="34" charset="-120"/>
+              </a:rPr>
+              <a:t>Light switches</a:t>
+            </a:r>
+            <a:endParaRPr lang="en-US" sz="1600" dirty="0"/>
+          </a:p>
+        </p:txBody>
+      </p:sp>
+      <p:sp>
+        <p:nvSpPr>
+          <p:cNvPr id="15" name="Text 13"/>
+          <p:cNvSpPr txBox="1"/>
+          <p:nvPr/>
+        </p:nvSpPr>
+        <p:spPr>
+          <a:xfrm>
+            <a:off x="822960" y="4361688"/>
+            <a:ext cx="4754880" cy="1005840"/>
+          </a:xfrm>
+          <a:prstGeom prst="rect">
+            <a:avLst/>
+          </a:prstGeom>
+          <a:noFill/>
+          <a:ln/>
+        </p:spPr>
+        <p:txBody>
+          <a:bodyPr wrap="square" lIns="0" tIns="0" rIns="0" bIns="0" rtlCol="0" anchor="t"/>
+          <a:lstStyle/>
+          <a:p>
+            <a:pPr indent="0" marL="0">
+              <a:lnSpc>
+                <a:spcPct val="120000"/>
+              </a:lnSpc>
+              <a:buNone/>
+            </a:pPr>
+            <a:r>
+              <a:rPr lang="en-US" sz="1300" dirty="0">
+                <a:solidFill>
+                  <a:srgbClr val="667085"/>
+                </a:solidFill>
+                <a:latin typeface="IBM Plex Sans" pitchFamily="34" charset="0"/>
+                <a:ea typeface="IBM Plex Sans" pitchFamily="34" charset="-122"/>
+                <a:cs typeface="IBM Plex Sans" pitchFamily="34" charset="-120"/>
+              </a:rPr>
+              <a:t>The two-way light switches at the top and bottom of many staircases work like an XOR gate: flipping either switch changes the light.</a:t>
+            </a:r>
+            <a:endParaRPr lang="en-US" sz="1300" dirty="0"/>
+          </a:p>
+        </p:txBody>
+      </p:sp>
+      <p:sp>
+        <p:nvSpPr>
+          <p:cNvPr id="16" name="Shape 14"/>
+          <p:cNvSpPr/>
+          <p:nvPr/>
+        </p:nvSpPr>
+        <p:spPr>
+          <a:xfrm>
+            <a:off x="6217920" y="3794760"/>
+            <a:ext cx="5394960" cy="1737360"/>
+          </a:xfrm>
+          <a:prstGeom prst="roundRect">
+            <a:avLst>
+              <a:gd name="adj" fmla="val 6316"/>
+            </a:avLst>
+          </a:prstGeom>
+          <a:solidFill>
+            <a:srgbClr val="FFFFFF"/>
+          </a:solidFill>
+          <a:ln w="15875">
+            <a:solidFill>
+              <a:srgbClr val="08A6A6"/>
+            </a:solidFill>
+            <a:prstDash val="solid"/>
+          </a:ln>
+        </p:spPr>
+      </p:sp>
+      <p:sp>
+        <p:nvSpPr>
+          <p:cNvPr id="17" name="Text 15"/>
+          <p:cNvSpPr txBox="1"/>
+          <p:nvPr/>
+        </p:nvSpPr>
+        <p:spPr>
+          <a:xfrm>
+            <a:off x="6537960" y="3977640"/>
+            <a:ext cx="4754880" cy="365760"/>
+          </a:xfrm>
+          <a:prstGeom prst="rect">
+            <a:avLst/>
+          </a:prstGeom>
+          <a:noFill/>
+          <a:ln/>
+        </p:spPr>
+        <p:txBody>
+          <a:bodyPr wrap="square" lIns="0" tIns="0" rIns="0" bIns="0" rtlCol="0" anchor="ctr"/>
+          <a:lstStyle/>
+          <a:p>
+            <a:pPr indent="0" marL="0">
+              <a:buNone/>
+            </a:pPr>
+            <a:r>
+              <a:rPr lang="en-US" sz="1600" b="1" dirty="0">
+                <a:solidFill>
+                  <a:srgbClr val="08A6A6"/>
+                </a:solidFill>
+                <a:latin typeface="IBM Plex Sans" pitchFamily="34" charset="0"/>
+                <a:ea typeface="IBM Plex Sans" pitchFamily="34" charset="-122"/>
+                <a:cs typeface="IBM Plex Sans" pitchFamily="34" charset="-120"/>
+              </a:rPr>
+              <a:t>Truth tables everywhere</a:t>
+            </a:r>
+            <a:endParaRPr lang="en-US" sz="1600" dirty="0"/>
+          </a:p>
+        </p:txBody>
+      </p:sp>
+      <p:sp>
+        <p:nvSpPr>
+          <p:cNvPr id="18" name="Text 16"/>
+          <p:cNvSpPr txBox="1"/>
+          <p:nvPr/>
+        </p:nvSpPr>
+        <p:spPr>
+          <a:xfrm>
+            <a:off x="6537960" y="4361688"/>
+            <a:ext cx="4754880" cy="1005840"/>
+          </a:xfrm>
+          <a:prstGeom prst="rect">
+            <a:avLst/>
+          </a:prstGeom>
+          <a:noFill/>
+          <a:ln/>
+        </p:spPr>
+        <p:txBody>
+          <a:bodyPr wrap="square" lIns="0" tIns="0" rIns="0" bIns="0" rtlCol="0" anchor="t"/>
+          <a:lstStyle/>
+          <a:p>
+            <a:pPr indent="0" marL="0">
+              <a:lnSpc>
+                <a:spcPct val="120000"/>
+              </a:lnSpc>
+              <a:buNone/>
+            </a:pPr>
+            <a:r>
+              <a:rPr lang="en-US" sz="1300" dirty="0">
+                <a:solidFill>
+                  <a:srgbClr val="667085"/>
+                </a:solidFill>
+                <a:latin typeface="IBM Plex Sans" pitchFamily="34" charset="0"/>
+                <a:ea typeface="IBM Plex Sans" pitchFamily="34" charset="-122"/>
+                <a:cs typeface="IBM Plex Sans" pitchFamily="34" charset="-120"/>
+              </a:rPr>
+              <a:t>Engineers use truth tables to test that circuits do exactly what they should, before building them.</a:t>
+            </a:r>
+            <a:endParaRPr lang="en-US" sz="1300" dirty="0"/>
+          </a:p>
+        </p:txBody>
+      </p:sp>
+    </p:spTree>
+  </p:cSld>
+  <p:clrMapOvr>
+    <a:masterClrMapping/>
+  </p:clrMapOvr>
+</p:sld>
+</file>
+
+<file path=ppt/slides/slide15.xml><?xml version="1.0" encoding="utf-8"?>
+<p:sld xmlns:a="http://schemas.openxmlformats.org/drawingml/2006/main" xmlns:r="http://schemas.openxmlformats.org/officeDocument/2006/relationships" xmlns:p="http://schemas.openxmlformats.org/presentationml/2006/main">
+  <p:cSld name="Slide 15">
+    <p:bg>
+      <p:bgPr>
+        <a:solidFill>
+          <a:srgbClr val="F7F7F4"/>
+        </a:solidFill>
+      </p:bgPr>
+    </p:bg>
+    <p:spTree>
+      <p:nvGrpSpPr>
+        <p:cNvPr id="1" name=""/>
+        <p:cNvGrpSpPr/>
+        <p:nvPr/>
+      </p:nvGrpSpPr>
+      <p:grpSpPr>
+        <a:xfrm>
+          <a:off x="0" y="0"/>
+          <a:ext cx="0" cy="0"/>
+          <a:chOff x="0" y="0"/>
+          <a:chExt cx="0" cy="0"/>
+        </a:xfrm>
+      </p:grpSpPr>
+      <p:sp>
+        <p:nvSpPr>
+          <p:cNvPr id="2" name="Shape 0"/>
+          <p:cNvSpPr/>
+          <p:nvPr/>
+        </p:nvSpPr>
+        <p:spPr>
+          <a:xfrm>
+            <a:off x="0" y="0"/>
+            <a:ext cx="12188952" cy="82296"/>
+          </a:xfrm>
+          <a:prstGeom prst="rect">
+            <a:avLst/>
+          </a:prstGeom>
+          <a:solidFill>
+            <a:srgbClr val="2D63FF"/>
+          </a:solidFill>
+          <a:ln/>
+        </p:spPr>
+      </p:sp>
+      <p:sp>
+        <p:nvSpPr>
+          <p:cNvPr id="3" name="Text 1"/>
+          <p:cNvSpPr txBox="1"/>
+          <p:nvPr/>
+        </p:nvSpPr>
+        <p:spPr>
+          <a:xfrm>
+            <a:off x="502920" y="6236208"/>
+            <a:ext cx="7772400" cy="365760"/>
+          </a:xfrm>
+          <a:prstGeom prst="rect">
+            <a:avLst/>
+          </a:prstGeom>
+          <a:noFill/>
+          <a:ln/>
+        </p:spPr>
+        <p:txBody>
+          <a:bodyPr wrap="square" lIns="0" tIns="0" rIns="0" bIns="0" rtlCol="0" anchor="ctr"/>
+          <a:lstStyle/>
+          <a:p>
+            <a:pPr indent="0" marL="0">
+              <a:buNone/>
+            </a:pPr>
+            <a:r>
+              <a:rPr lang="en-US" sz="1100" dirty="0">
+                <a:solidFill>
+                  <a:srgbClr val="667085"/>
+                </a:solidFill>
+                <a:latin typeface="IBM Plex Mono" pitchFamily="34" charset="0"/>
+                <a:ea typeface="IBM Plex Mono" pitchFamily="34" charset="-122"/>
+                <a:cs typeface="IBM Plex Mono" pitchFamily="34" charset="-120"/>
+              </a:rPr>
+              <a:t>2.4 Boolean logic  |  Lesson 2</a:t>
+            </a:r>
+            <a:endParaRPr lang="en-US" sz="1100" dirty="0"/>
+          </a:p>
+        </p:txBody>
+      </p:sp>
+      <p:sp>
+        <p:nvSpPr>
+          <p:cNvPr id="4" name="Text 2"/>
+          <p:cNvSpPr txBox="1"/>
+          <p:nvPr/>
+        </p:nvSpPr>
+        <p:spPr>
+          <a:xfrm>
+            <a:off x="9326880" y="6236208"/>
+            <a:ext cx="2377440" cy="365760"/>
+          </a:xfrm>
+          <a:prstGeom prst="rect">
+            <a:avLst/>
+          </a:prstGeom>
+          <a:noFill/>
+          <a:ln/>
+        </p:spPr>
+        <p:txBody>
+          <a:bodyPr wrap="square" lIns="0" tIns="0" rIns="0" bIns="0" rtlCol="0" anchor="ctr"/>
+          <a:lstStyle/>
+          <a:p>
+            <a:pPr algn="r" indent="0" marL="0">
+              <a:buNone/>
+            </a:pPr>
+            <a:r>
+              <a:rPr lang="en-US" sz="1100" dirty="0">
+                <a:solidFill>
+                  <a:srgbClr val="667085"/>
+                </a:solidFill>
+                <a:latin typeface="IBM Plex Mono" pitchFamily="34" charset="0"/>
+                <a:ea typeface="IBM Plex Mono" pitchFamily="34" charset="-122"/>
+                <a:cs typeface="IBM Plex Mono" pitchFamily="34" charset="-120"/>
+              </a:rPr>
+              <a:t>Revise 360</a:t>
+            </a:r>
+            <a:endParaRPr lang="en-US" sz="1100" dirty="0"/>
+          </a:p>
+        </p:txBody>
+      </p:sp>
+      <p:sp>
+        <p:nvSpPr>
+          <p:cNvPr id="5" name="Text 3"/>
+          <p:cNvSpPr txBox="1"/>
+          <p:nvPr/>
+        </p:nvSpPr>
+        <p:spPr>
+          <a:xfrm>
+            <a:off x="502920" y="411480"/>
+            <a:ext cx="11155680" cy="777240"/>
+          </a:xfrm>
+          <a:prstGeom prst="rect">
+            <a:avLst/>
+          </a:prstGeom>
+          <a:noFill/>
+          <a:ln/>
+        </p:spPr>
+        <p:txBody>
+          <a:bodyPr wrap="square" lIns="0" tIns="0" rIns="0" bIns="0" rtlCol="0" anchor="ctr"/>
+          <a:lstStyle/>
+          <a:p>
+            <a:pPr indent="0" marL="0">
+              <a:buNone/>
+            </a:pPr>
+            <a:r>
+              <a:rPr lang="en-US" sz="3200" b="1" dirty="0">
+                <a:solidFill>
+                  <a:srgbClr val="101828"/>
+                </a:solidFill>
+                <a:latin typeface="IBM Plex Sans" pitchFamily="34" charset="0"/>
+                <a:ea typeface="IBM Plex Sans" pitchFamily="34" charset="-122"/>
+                <a:cs typeface="IBM Plex Sans" pitchFamily="34" charset="-120"/>
+              </a:rPr>
+              <a:t>Exam practice</a:t>
+            </a:r>
+            <a:endParaRPr lang="en-US" sz="3200" dirty="0"/>
+          </a:p>
+        </p:txBody>
+      </p:sp>
+      <p:sp>
+        <p:nvSpPr>
+          <p:cNvPr id="6" name="Text 4"/>
+          <p:cNvSpPr txBox="1"/>
+          <p:nvPr/>
+        </p:nvSpPr>
+        <p:spPr>
+          <a:xfrm>
+            <a:off x="502920" y="1170432"/>
+            <a:ext cx="11155680" cy="411480"/>
+          </a:xfrm>
+          <a:prstGeom prst="rect">
+            <a:avLst/>
+          </a:prstGeom>
+          <a:noFill/>
+          <a:ln/>
+        </p:spPr>
+        <p:txBody>
+          <a:bodyPr wrap="square" lIns="0" tIns="0" rIns="0" bIns="0" rtlCol="0" anchor="ctr"/>
+          <a:lstStyle/>
+          <a:p>
+            <a:pPr indent="0" marL="0">
+              <a:buNone/>
+            </a:pPr>
+            <a:r>
+              <a:rPr lang="en-US" sz="1500" dirty="0">
+                <a:solidFill>
+                  <a:srgbClr val="667085"/>
+                </a:solidFill>
+                <a:latin typeface="IBM Plex Sans" pitchFamily="34" charset="0"/>
+                <a:ea typeface="IBM Plex Sans" pitchFamily="34" charset="-122"/>
+                <a:cs typeface="IBM Plex Sans" pitchFamily="34" charset="-120"/>
+              </a:rPr>
+              <a:t>Devices away. Answer from memory on the worksheet.</a:t>
+            </a:r>
+            <a:endParaRPr lang="en-US" sz="1500" dirty="0"/>
+          </a:p>
+        </p:txBody>
+      </p:sp>
+      <p:sp>
+        <p:nvSpPr>
+          <p:cNvPr id="7" name="Shape 5"/>
+          <p:cNvSpPr/>
+          <p:nvPr/>
+        </p:nvSpPr>
+        <p:spPr>
+          <a:xfrm>
+            <a:off x="502920" y="1828800"/>
+            <a:ext cx="11155680" cy="1097280"/>
+          </a:xfrm>
+          <a:prstGeom prst="roundRect">
+            <a:avLst>
+              <a:gd name="adj" fmla="val 10000"/>
+            </a:avLst>
+          </a:prstGeom>
+          <a:solidFill>
+            <a:srgbClr val="FFFFFF"/>
+          </a:solidFill>
+          <a:ln w="15875">
+            <a:solidFill>
+              <a:srgbClr val="D9DEE7"/>
+            </a:solidFill>
+            <a:prstDash val="solid"/>
+          </a:ln>
+        </p:spPr>
+      </p:sp>
+      <p:sp>
+        <p:nvSpPr>
+          <p:cNvPr id="8" name="Text 6"/>
+          <p:cNvSpPr txBox="1"/>
+          <p:nvPr/>
+        </p:nvSpPr>
+        <p:spPr>
+          <a:xfrm>
+            <a:off x="914400" y="1938528"/>
+            <a:ext cx="9418320" cy="877824"/>
+          </a:xfrm>
+          <a:prstGeom prst="rect">
+            <a:avLst/>
+          </a:prstGeom>
+          <a:noFill/>
+          <a:ln/>
+        </p:spPr>
+        <p:txBody>
+          <a:bodyPr wrap="square" lIns="0" tIns="0" rIns="0" bIns="0" rtlCol="0" anchor="ctr"/>
+          <a:lstStyle/>
+          <a:p>
+            <a:pPr indent="0" marL="0">
+              <a:lnSpc>
+                <a:spcPct val="118000"/>
+              </a:lnSpc>
+              <a:buNone/>
+            </a:pPr>
+            <a:r>
+              <a:rPr lang="en-US" sz="1700" dirty="0">
+                <a:solidFill>
+                  <a:srgbClr val="101828"/>
+                </a:solidFill>
+                <a:latin typeface="IBM Plex Sans" pitchFamily="34" charset="0"/>
+                <a:ea typeface="IBM Plex Sans" pitchFamily="34" charset="-122"/>
+                <a:cs typeface="IBM Plex Sans" pitchFamily="34" charset="-120"/>
+              </a:rPr>
+              <a:t>State how many rows a truth table needs for four inputs.</a:t>
+            </a:r>
+            <a:endParaRPr lang="en-US" sz="1700" dirty="0"/>
+          </a:p>
+        </p:txBody>
+      </p:sp>
+      <p:sp>
+        <p:nvSpPr>
+          <p:cNvPr id="9" name="Shape 7"/>
+          <p:cNvSpPr/>
+          <p:nvPr/>
+        </p:nvSpPr>
+        <p:spPr>
+          <a:xfrm>
+            <a:off x="10515600" y="2130552"/>
+            <a:ext cx="868680" cy="493776"/>
+          </a:xfrm>
+          <a:prstGeom prst="roundRect">
+            <a:avLst>
+              <a:gd name="adj" fmla="val 18519"/>
+            </a:avLst>
+          </a:prstGeom>
+          <a:solidFill>
+            <a:srgbClr val="EEF2FB"/>
+          </a:solidFill>
+          <a:ln/>
+        </p:spPr>
+      </p:sp>
+      <p:sp>
+        <p:nvSpPr>
+          <p:cNvPr id="10" name="Text 8"/>
+          <p:cNvSpPr txBox="1"/>
+          <p:nvPr/>
+        </p:nvSpPr>
+        <p:spPr>
+          <a:xfrm>
+            <a:off x="10515600" y="2130552"/>
+            <a:ext cx="868680" cy="493776"/>
+          </a:xfrm>
+          <a:prstGeom prst="rect">
+            <a:avLst/>
+          </a:prstGeom>
+          <a:noFill/>
+          <a:ln/>
+        </p:spPr>
+        <p:txBody>
+          <a:bodyPr wrap="square" lIns="0" tIns="0" rIns="0" bIns="0" rtlCol="0" anchor="ctr"/>
+          <a:lstStyle/>
+          <a:p>
+            <a:pPr algn="ctr" indent="0" marL="0">
+              <a:buNone/>
+            </a:pPr>
+            <a:r>
+              <a:rPr lang="en-US" sz="1500" b="1" dirty="0">
+                <a:solidFill>
+                  <a:srgbClr val="2D63FF"/>
+                </a:solidFill>
+                <a:latin typeface="IBM Plex Mono" pitchFamily="34" charset="0"/>
+                <a:ea typeface="IBM Plex Mono" pitchFamily="34" charset="-122"/>
+                <a:cs typeface="IBM Plex Mono" pitchFamily="34" charset="-120"/>
+              </a:rPr>
+              <a:t>[1]</a:t>
+            </a:r>
+            <a:endParaRPr lang="en-US" sz="1500" dirty="0"/>
+          </a:p>
+        </p:txBody>
+      </p:sp>
+      <p:sp>
+        <p:nvSpPr>
+          <p:cNvPr id="11" name="Shape 9"/>
+          <p:cNvSpPr/>
+          <p:nvPr/>
+        </p:nvSpPr>
+        <p:spPr>
+          <a:xfrm>
+            <a:off x="502920" y="3127248"/>
+            <a:ext cx="11155680" cy="1097280"/>
+          </a:xfrm>
+          <a:prstGeom prst="roundRect">
+            <a:avLst>
+              <a:gd name="adj" fmla="val 10000"/>
+            </a:avLst>
+          </a:prstGeom>
+          <a:solidFill>
+            <a:srgbClr val="FFFFFF"/>
+          </a:solidFill>
+          <a:ln w="15875">
+            <a:solidFill>
+              <a:srgbClr val="D9DEE7"/>
+            </a:solidFill>
+            <a:prstDash val="solid"/>
+          </a:ln>
+        </p:spPr>
+      </p:sp>
+      <p:sp>
+        <p:nvSpPr>
+          <p:cNvPr id="12" name="Text 10"/>
+          <p:cNvSpPr txBox="1"/>
+          <p:nvPr/>
+        </p:nvSpPr>
+        <p:spPr>
+          <a:xfrm>
+            <a:off x="914400" y="3236976"/>
+            <a:ext cx="9418320" cy="877824"/>
+          </a:xfrm>
+          <a:prstGeom prst="rect">
+            <a:avLst/>
+          </a:prstGeom>
+          <a:noFill/>
+          <a:ln/>
+        </p:spPr>
+        <p:txBody>
+          <a:bodyPr wrap="square" lIns="0" tIns="0" rIns="0" bIns="0" rtlCol="0" anchor="ctr"/>
+          <a:lstStyle/>
+          <a:p>
+            <a:pPr indent="0" marL="0">
+              <a:lnSpc>
+                <a:spcPct val="118000"/>
+              </a:lnSpc>
+              <a:buNone/>
+            </a:pPr>
+            <a:r>
+              <a:rPr lang="en-US" sz="1700" dirty="0">
+                <a:solidFill>
+                  <a:srgbClr val="101828"/>
+                </a:solidFill>
+                <a:latin typeface="IBM Plex Sans" pitchFamily="34" charset="0"/>
+                <a:ea typeface="IBM Plex Sans" pitchFamily="34" charset="-122"/>
+                <a:cs typeface="IBM Plex Sans" pitchFamily="34" charset="-120"/>
+              </a:rPr>
+              <a:t>Complete a truth table for Q = NOT P OR (Q AND R) on the back of this sheet.</a:t>
+            </a:r>
+            <a:endParaRPr lang="en-US" sz="1700" dirty="0"/>
+          </a:p>
+        </p:txBody>
+      </p:sp>
+      <p:sp>
+        <p:nvSpPr>
+          <p:cNvPr id="13" name="Shape 11"/>
+          <p:cNvSpPr/>
+          <p:nvPr/>
+        </p:nvSpPr>
+        <p:spPr>
+          <a:xfrm>
+            <a:off x="10515600" y="3429000"/>
+            <a:ext cx="868680" cy="493776"/>
+          </a:xfrm>
+          <a:prstGeom prst="roundRect">
+            <a:avLst>
+              <a:gd name="adj" fmla="val 18519"/>
+            </a:avLst>
+          </a:prstGeom>
+          <a:solidFill>
+            <a:srgbClr val="EEF2FB"/>
+          </a:solidFill>
+          <a:ln/>
+        </p:spPr>
+      </p:sp>
+      <p:sp>
+        <p:nvSpPr>
+          <p:cNvPr id="14" name="Text 12"/>
+          <p:cNvSpPr txBox="1"/>
+          <p:nvPr/>
+        </p:nvSpPr>
+        <p:spPr>
+          <a:xfrm>
+            <a:off x="10515600" y="3429000"/>
+            <a:ext cx="868680" cy="493776"/>
+          </a:xfrm>
+          <a:prstGeom prst="rect">
+            <a:avLst/>
+          </a:prstGeom>
+          <a:noFill/>
+          <a:ln/>
+        </p:spPr>
+        <p:txBody>
+          <a:bodyPr wrap="square" lIns="0" tIns="0" rIns="0" bIns="0" rtlCol="0" anchor="ctr"/>
+          <a:lstStyle/>
+          <a:p>
+            <a:pPr algn="ctr" indent="0" marL="0">
+              <a:buNone/>
+            </a:pPr>
+            <a:r>
+              <a:rPr lang="en-US" sz="1500" b="1" dirty="0">
+                <a:solidFill>
+                  <a:srgbClr val="2D63FF"/>
+                </a:solidFill>
+                <a:latin typeface="IBM Plex Mono" pitchFamily="34" charset="0"/>
+                <a:ea typeface="IBM Plex Mono" pitchFamily="34" charset="-122"/>
+                <a:cs typeface="IBM Plex Mono" pitchFamily="34" charset="-120"/>
+              </a:rPr>
+              <a:t>[8]</a:t>
+            </a:r>
+            <a:endParaRPr lang="en-US" sz="1500" dirty="0"/>
+          </a:p>
+        </p:txBody>
+      </p:sp>
+    </p:spTree>
+  </p:cSld>
+  <p:clrMapOvr>
+    <a:masterClrMapping/>
+  </p:clrMapOvr>
+</p:sld>
+</file>
+
+<file path=ppt/slides/slide16.xml><?xml version="1.0" encoding="utf-8"?>
+<p:sld xmlns:a="http://schemas.openxmlformats.org/drawingml/2006/main" xmlns:r="http://schemas.openxmlformats.org/officeDocument/2006/relationships" xmlns:p="http://schemas.openxmlformats.org/presentationml/2006/main">
+  <p:cSld name="Slide 16">
     <p:bg>
       <p:bgPr>
         <a:solidFill>
